--- a/TiledWFA.pptx
+++ b/TiledWFA.pptx
@@ -5,18 +5,20 @@
     <p:sldMasterId id="2147483662" r:id="rId1"/>
   </p:sldMasterIdLst>
   <p:notesMasterIdLst>
-    <p:notesMasterId r:id="rId11"/>
+    <p:notesMasterId r:id="rId13"/>
   </p:notesMasterIdLst>
   <p:sldIdLst>
     <p:sldId id="271" r:id="rId2"/>
     <p:sldId id="272" r:id="rId3"/>
     <p:sldId id="263" r:id="rId4"/>
     <p:sldId id="273" r:id="rId5"/>
-    <p:sldId id="274" r:id="rId6"/>
-    <p:sldId id="275" r:id="rId7"/>
-    <p:sldId id="276" r:id="rId8"/>
-    <p:sldId id="277" r:id="rId9"/>
-    <p:sldId id="278" r:id="rId10"/>
+    <p:sldId id="279" r:id="rId6"/>
+    <p:sldId id="274" r:id="rId7"/>
+    <p:sldId id="275" r:id="rId8"/>
+    <p:sldId id="276" r:id="rId9"/>
+    <p:sldId id="277" r:id="rId10"/>
+    <p:sldId id="278" r:id="rId11"/>
+    <p:sldId id="280" r:id="rId12"/>
   </p:sldIdLst>
   <p:sldSz cx="9144000" cy="5143500" type="screen16x9"/>
   <p:notesSz cx="6858000" cy="9144000"/>
@@ -268,12 +270,20 @@
 </p:presentation>
 </file>
 
+<file path=ppt/revisionInfo.xml><?xml version="1.0" encoding="utf-8"?>
+<p1510:revInfo xmlns:a="http://schemas.openxmlformats.org/drawingml/2006/main" xmlns:r="http://schemas.openxmlformats.org/officeDocument/2006/relationships" xmlns:p1510="http://schemas.microsoft.com/office/powerpoint/2015/10/main">
+  <p1510:revLst>
+    <p1510:client id="{0295EF14-86E8-4314-86EB-1B4AAA093E7D}" v="893" dt="2026-03-13T10:21:57.939"/>
+  </p1510:revLst>
+</p1510:revInfo>
+</file>
+
 <file path=ppt/changesInfos/changesInfo1.xml><?xml version="1.0" encoding="utf-8"?>
 <pc:chgInfo xmlns:a="http://schemas.openxmlformats.org/drawingml/2006/main" xmlns:r="http://schemas.openxmlformats.org/officeDocument/2006/relationships" xmlns:ac="http://schemas.microsoft.com/office/drawing/2013/main/command" xmlns:pc="http://schemas.microsoft.com/office/powerpoint/2013/main/command">
   <pc:docChgLst>
     <pc:chgData name="Juan Carlos Moure Lopez" userId="2db23dd4-09f1-4b6a-9c5d-d257e5850e3c" providerId="ADAL" clId="{971D71D3-F01A-462C-A4C9-10112751BFB5}"/>
-    <pc:docChg chg="undo custSel addSld delSld modSld sldOrd">
-      <pc:chgData name="Juan Carlos Moure Lopez" userId="2db23dd4-09f1-4b6a-9c5d-d257e5850e3c" providerId="ADAL" clId="{971D71D3-F01A-462C-A4C9-10112751BFB5}" dt="2026-03-08T22:22:32.025" v="1093" actId="1035"/>
+    <pc:docChg chg="undo redo custSel addSld delSld modSld sldOrd">
+      <pc:chgData name="Juan Carlos Moure Lopez" userId="2db23dd4-09f1-4b6a-9c5d-d257e5850e3c" providerId="ADAL" clId="{971D71D3-F01A-462C-A4C9-10112751BFB5}" dt="2026-03-13T10:22:21.308" v="2394" actId="1076"/>
       <pc:docMkLst>
         <pc:docMk/>
       </pc:docMkLst>
@@ -317,13 +327,13 @@
         </pc:picChg>
       </pc:sldChg>
       <pc:sldChg chg="addSp delSp modSp mod ord addAnim delAnim modAnim modNotesTx">
-        <pc:chgData name="Juan Carlos Moure Lopez" userId="2db23dd4-09f1-4b6a-9c5d-d257e5850e3c" providerId="ADAL" clId="{971D71D3-F01A-462C-A4C9-10112751BFB5}" dt="2026-03-07T18:19:25.322" v="1048" actId="1035"/>
+        <pc:chgData name="Juan Carlos Moure Lopez" userId="2db23dd4-09f1-4b6a-9c5d-d257e5850e3c" providerId="ADAL" clId="{971D71D3-F01A-462C-A4C9-10112751BFB5}" dt="2026-03-13T10:21:18.614" v="2370" actId="1076"/>
         <pc:sldMkLst>
           <pc:docMk/>
           <pc:sldMk cId="0" sldId="271"/>
         </pc:sldMkLst>
         <pc:spChg chg="add mod">
-          <ac:chgData name="Juan Carlos Moure Lopez" userId="2db23dd4-09f1-4b6a-9c5d-d257e5850e3c" providerId="ADAL" clId="{971D71D3-F01A-462C-A4C9-10112751BFB5}" dt="2026-02-28T09:05:54.517" v="168" actId="207"/>
+          <ac:chgData name="Juan Carlos Moure Lopez" userId="2db23dd4-09f1-4b6a-9c5d-d257e5850e3c" providerId="ADAL" clId="{971D71D3-F01A-462C-A4C9-10112751BFB5}" dt="2026-03-13T10:18:51.177" v="2279" actId="1037"/>
           <ac:spMkLst>
             <pc:docMk/>
             <pc:sldMk cId="0" sldId="271"/>
@@ -339,7 +349,7 @@
           </ac:spMkLst>
         </pc:spChg>
         <pc:spChg chg="add mod">
-          <ac:chgData name="Juan Carlos Moure Lopez" userId="2db23dd4-09f1-4b6a-9c5d-d257e5850e3c" providerId="ADAL" clId="{971D71D3-F01A-462C-A4C9-10112751BFB5}" dt="2026-02-28T09:07:20.109" v="202" actId="207"/>
+          <ac:chgData name="Juan Carlos Moure Lopez" userId="2db23dd4-09f1-4b6a-9c5d-d257e5850e3c" providerId="ADAL" clId="{971D71D3-F01A-462C-A4C9-10112751BFB5}" dt="2026-03-13T10:18:51.177" v="2279" actId="1037"/>
           <ac:spMkLst>
             <pc:docMk/>
             <pc:sldMk cId="0" sldId="271"/>
@@ -347,7 +357,23 @@
           </ac:spMkLst>
         </pc:spChg>
         <pc:spChg chg="add mod">
-          <ac:chgData name="Juan Carlos Moure Lopez" userId="2db23dd4-09f1-4b6a-9c5d-d257e5850e3c" providerId="ADAL" clId="{971D71D3-F01A-462C-A4C9-10112751BFB5}" dt="2026-02-28T09:06:30.580" v="185" actId="20577"/>
+          <ac:chgData name="Juan Carlos Moure Lopez" userId="2db23dd4-09f1-4b6a-9c5d-d257e5850e3c" providerId="ADAL" clId="{971D71D3-F01A-462C-A4C9-10112751BFB5}" dt="2026-03-13T10:20:01.246" v="2310" actId="207"/>
+          <ac:spMkLst>
+            <pc:docMk/>
+            <pc:sldMk cId="0" sldId="271"/>
+            <ac:spMk id="5" creationId="{3B926F55-B11C-2939-FA90-58951132A6F6}"/>
+          </ac:spMkLst>
+        </pc:spChg>
+        <pc:spChg chg="add mod">
+          <ac:chgData name="Juan Carlos Moure Lopez" userId="2db23dd4-09f1-4b6a-9c5d-d257e5850e3c" providerId="ADAL" clId="{971D71D3-F01A-462C-A4C9-10112751BFB5}" dt="2026-03-13T10:21:18.614" v="2370" actId="1076"/>
+          <ac:spMkLst>
+            <pc:docMk/>
+            <pc:sldMk cId="0" sldId="271"/>
+            <ac:spMk id="6" creationId="{E541B946-254C-FEA9-82BE-05436D9BB784}"/>
+          </ac:spMkLst>
+        </pc:spChg>
+        <pc:spChg chg="add mod">
+          <ac:chgData name="Juan Carlos Moure Lopez" userId="2db23dd4-09f1-4b6a-9c5d-d257e5850e3c" providerId="ADAL" clId="{971D71D3-F01A-462C-A4C9-10112751BFB5}" dt="2026-03-13T10:18:51.177" v="2279" actId="1037"/>
           <ac:spMkLst>
             <pc:docMk/>
             <pc:sldMk cId="0" sldId="271"/>
@@ -355,7 +381,7 @@
           </ac:spMkLst>
         </pc:spChg>
         <pc:spChg chg="add mod">
-          <ac:chgData name="Juan Carlos Moure Lopez" userId="2db23dd4-09f1-4b6a-9c5d-d257e5850e3c" providerId="ADAL" clId="{971D71D3-F01A-462C-A4C9-10112751BFB5}" dt="2026-02-28T09:08:10.442" v="228" actId="20577"/>
+          <ac:chgData name="Juan Carlos Moure Lopez" userId="2db23dd4-09f1-4b6a-9c5d-d257e5850e3c" providerId="ADAL" clId="{971D71D3-F01A-462C-A4C9-10112751BFB5}" dt="2026-03-13T10:18:51.177" v="2279" actId="1037"/>
           <ac:spMkLst>
             <pc:docMk/>
             <pc:sldMk cId="0" sldId="271"/>
@@ -363,7 +389,7 @@
           </ac:spMkLst>
         </pc:spChg>
         <pc:spChg chg="add mod">
-          <ac:chgData name="Juan Carlos Moure Lopez" userId="2db23dd4-09f1-4b6a-9c5d-d257e5850e3c" providerId="ADAL" clId="{971D71D3-F01A-462C-A4C9-10112751BFB5}" dt="2026-02-28T09:12:10.992" v="343" actId="1076"/>
+          <ac:chgData name="Juan Carlos Moure Lopez" userId="2db23dd4-09f1-4b6a-9c5d-d257e5850e3c" providerId="ADAL" clId="{971D71D3-F01A-462C-A4C9-10112751BFB5}" dt="2026-03-13T10:18:51.177" v="2279" actId="1037"/>
           <ac:spMkLst>
             <pc:docMk/>
             <pc:sldMk cId="0" sldId="271"/>
@@ -371,7 +397,7 @@
           </ac:spMkLst>
         </pc:spChg>
         <pc:spChg chg="add mod">
-          <ac:chgData name="Juan Carlos Moure Lopez" userId="2db23dd4-09f1-4b6a-9c5d-d257e5850e3c" providerId="ADAL" clId="{971D71D3-F01A-462C-A4C9-10112751BFB5}" dt="2026-02-28T09:10:07.501" v="332" actId="14100"/>
+          <ac:chgData name="Juan Carlos Moure Lopez" userId="2db23dd4-09f1-4b6a-9c5d-d257e5850e3c" providerId="ADAL" clId="{971D71D3-F01A-462C-A4C9-10112751BFB5}" dt="2026-03-13T10:19:03.444" v="2281" actId="1076"/>
           <ac:spMkLst>
             <pc:docMk/>
             <pc:sldMk cId="0" sldId="271"/>
@@ -395,7 +421,7 @@
           </ac:spMkLst>
         </pc:spChg>
         <pc:spChg chg="mod">
-          <ac:chgData name="Juan Carlos Moure Lopez" userId="2db23dd4-09f1-4b6a-9c5d-d257e5850e3c" providerId="ADAL" clId="{971D71D3-F01A-462C-A4C9-10112751BFB5}" dt="2026-02-28T09:03:08.708" v="28" actId="6549"/>
+          <ac:chgData name="Juan Carlos Moure Lopez" userId="2db23dd4-09f1-4b6a-9c5d-d257e5850e3c" providerId="ADAL" clId="{971D71D3-F01A-462C-A4C9-10112751BFB5}" dt="2026-03-13T10:17:50.599" v="2199" actId="20577"/>
           <ac:spMkLst>
             <pc:docMk/>
             <pc:sldMk cId="0" sldId="271"/>
@@ -403,7 +429,7 @@
           </ac:spMkLst>
         </pc:spChg>
         <pc:spChg chg="mod">
-          <ac:chgData name="Juan Carlos Moure Lopez" userId="2db23dd4-09f1-4b6a-9c5d-d257e5850e3c" providerId="ADAL" clId="{971D71D3-F01A-462C-A4C9-10112751BFB5}" dt="2026-02-28T09:05:58.010" v="169" actId="207"/>
+          <ac:chgData name="Juan Carlos Moure Lopez" userId="2db23dd4-09f1-4b6a-9c5d-d257e5850e3c" providerId="ADAL" clId="{971D71D3-F01A-462C-A4C9-10112751BFB5}" dt="2026-03-13T10:18:51.177" v="2279" actId="1037"/>
           <ac:spMkLst>
             <pc:docMk/>
             <pc:sldMk cId="0" sldId="271"/>
@@ -411,7 +437,7 @@
           </ac:spMkLst>
         </pc:spChg>
         <pc:spChg chg="mod">
-          <ac:chgData name="Juan Carlos Moure Lopez" userId="2db23dd4-09f1-4b6a-9c5d-d257e5850e3c" providerId="ADAL" clId="{971D71D3-F01A-462C-A4C9-10112751BFB5}" dt="2026-02-28T09:05:58.010" v="169" actId="207"/>
+          <ac:chgData name="Juan Carlos Moure Lopez" userId="2db23dd4-09f1-4b6a-9c5d-d257e5850e3c" providerId="ADAL" clId="{971D71D3-F01A-462C-A4C9-10112751BFB5}" dt="2026-03-13T10:18:51.177" v="2279" actId="1037"/>
           <ac:spMkLst>
             <pc:docMk/>
             <pc:sldMk cId="0" sldId="271"/>
@@ -419,7 +445,7 @@
           </ac:spMkLst>
         </pc:spChg>
         <pc:spChg chg="mod">
-          <ac:chgData name="Juan Carlos Moure Lopez" userId="2db23dd4-09f1-4b6a-9c5d-d257e5850e3c" providerId="ADAL" clId="{971D71D3-F01A-462C-A4C9-10112751BFB5}" dt="2026-02-28T09:06:02.804" v="172" actId="1076"/>
+          <ac:chgData name="Juan Carlos Moure Lopez" userId="2db23dd4-09f1-4b6a-9c5d-d257e5850e3c" providerId="ADAL" clId="{971D71D3-F01A-462C-A4C9-10112751BFB5}" dt="2026-03-13T10:18:51.177" v="2279" actId="1037"/>
           <ac:spMkLst>
             <pc:docMk/>
             <pc:sldMk cId="0" sldId="271"/>
@@ -427,7 +453,7 @@
           </ac:spMkLst>
         </pc:spChg>
         <pc:spChg chg="mod">
-          <ac:chgData name="Juan Carlos Moure Lopez" userId="2db23dd4-09f1-4b6a-9c5d-d257e5850e3c" providerId="ADAL" clId="{971D71D3-F01A-462C-A4C9-10112751BFB5}" dt="2026-02-28T09:07:29.235" v="205" actId="207"/>
+          <ac:chgData name="Juan Carlos Moure Lopez" userId="2db23dd4-09f1-4b6a-9c5d-d257e5850e3c" providerId="ADAL" clId="{971D71D3-F01A-462C-A4C9-10112751BFB5}" dt="2026-03-13T10:18:51.177" v="2279" actId="1037"/>
           <ac:spMkLst>
             <pc:docMk/>
             <pc:sldMk cId="0" sldId="271"/>
@@ -443,7 +469,7 @@
           </ac:spMkLst>
         </pc:spChg>
         <pc:spChg chg="mod">
-          <ac:chgData name="Juan Carlos Moure Lopez" userId="2db23dd4-09f1-4b6a-9c5d-d257e5850e3c" providerId="ADAL" clId="{971D71D3-F01A-462C-A4C9-10112751BFB5}" dt="2026-02-28T09:07:47.266" v="217" actId="113"/>
+          <ac:chgData name="Juan Carlos Moure Lopez" userId="2db23dd4-09f1-4b6a-9c5d-d257e5850e3c" providerId="ADAL" clId="{971D71D3-F01A-462C-A4C9-10112751BFB5}" dt="2026-03-13T10:21:15.952" v="2368" actId="1076"/>
           <ac:spMkLst>
             <pc:docMk/>
             <pc:sldMk cId="0" sldId="271"/>
@@ -459,7 +485,7 @@
           </ac:spMkLst>
         </pc:spChg>
         <pc:spChg chg="mod">
-          <ac:chgData name="Juan Carlos Moure Lopez" userId="2db23dd4-09f1-4b6a-9c5d-d257e5850e3c" providerId="ADAL" clId="{971D71D3-F01A-462C-A4C9-10112751BFB5}" dt="2026-02-28T09:07:16.159" v="201" actId="207"/>
+          <ac:chgData name="Juan Carlos Moure Lopez" userId="2db23dd4-09f1-4b6a-9c5d-d257e5850e3c" providerId="ADAL" clId="{971D71D3-F01A-462C-A4C9-10112751BFB5}" dt="2026-03-13T10:18:51.177" v="2279" actId="1037"/>
           <ac:spMkLst>
             <pc:docMk/>
             <pc:sldMk cId="0" sldId="271"/>
@@ -467,7 +493,7 @@
           </ac:spMkLst>
         </pc:spChg>
         <pc:spChg chg="mod">
-          <ac:chgData name="Juan Carlos Moure Lopez" userId="2db23dd4-09f1-4b6a-9c5d-d257e5850e3c" providerId="ADAL" clId="{971D71D3-F01A-462C-A4C9-10112751BFB5}" dt="2026-02-28T09:07:16.159" v="201" actId="207"/>
+          <ac:chgData name="Juan Carlos Moure Lopez" userId="2db23dd4-09f1-4b6a-9c5d-d257e5850e3c" providerId="ADAL" clId="{971D71D3-F01A-462C-A4C9-10112751BFB5}" dt="2026-03-13T10:21:15.488" v="2367" actId="1076"/>
           <ac:spMkLst>
             <pc:docMk/>
             <pc:sldMk cId="0" sldId="271"/>
@@ -475,7 +501,7 @@
           </ac:spMkLst>
         </pc:spChg>
         <pc:spChg chg="mod">
-          <ac:chgData name="Juan Carlos Moure Lopez" userId="2db23dd4-09f1-4b6a-9c5d-d257e5850e3c" providerId="ADAL" clId="{971D71D3-F01A-462C-A4C9-10112751BFB5}" dt="2026-03-07T18:19:18.769" v="1030" actId="1076"/>
+          <ac:chgData name="Juan Carlos Moure Lopez" userId="2db23dd4-09f1-4b6a-9c5d-d257e5850e3c" providerId="ADAL" clId="{971D71D3-F01A-462C-A4C9-10112751BFB5}" dt="2026-03-13T10:19:00.413" v="2280" actId="1076"/>
           <ac:spMkLst>
             <pc:docMk/>
             <pc:sldMk cId="0" sldId="271"/>
@@ -548,13 +574,13 @@
         </pc:cxnChg>
       </pc:sldChg>
       <pc:sldChg chg="addSp delSp modSp add mod modAnim">
-        <pc:chgData name="Juan Carlos Moure Lopez" userId="2db23dd4-09f1-4b6a-9c5d-d257e5850e3c" providerId="ADAL" clId="{971D71D3-F01A-462C-A4C9-10112751BFB5}" dt="2026-03-07T18:20:47.314" v="1057" actId="1076"/>
+        <pc:chgData name="Juan Carlos Moure Lopez" userId="2db23dd4-09f1-4b6a-9c5d-d257e5850e3c" providerId="ADAL" clId="{971D71D3-F01A-462C-A4C9-10112751BFB5}" dt="2026-03-13T10:22:21.308" v="2394" actId="1076"/>
         <pc:sldMkLst>
           <pc:docMk/>
           <pc:sldMk cId="1443830565" sldId="272"/>
         </pc:sldMkLst>
         <pc:spChg chg="add mod ord">
-          <ac:chgData name="Juan Carlos Moure Lopez" userId="2db23dd4-09f1-4b6a-9c5d-d257e5850e3c" providerId="ADAL" clId="{971D71D3-F01A-462C-A4C9-10112751BFB5}" dt="2026-02-28T09:50:00.562" v="765" actId="167"/>
+          <ac:chgData name="Juan Carlos Moure Lopez" userId="2db23dd4-09f1-4b6a-9c5d-d257e5850e3c" providerId="ADAL" clId="{971D71D3-F01A-462C-A4C9-10112751BFB5}" dt="2026-03-13T10:22:21.308" v="2394" actId="1076"/>
           <ac:spMkLst>
             <pc:docMk/>
             <pc:sldMk cId="1443830565" sldId="272"/>
@@ -578,7 +604,7 @@
           </ac:spMkLst>
         </pc:spChg>
         <pc:spChg chg="add mod">
-          <ac:chgData name="Juan Carlos Moure Lopez" userId="2db23dd4-09f1-4b6a-9c5d-d257e5850e3c" providerId="ADAL" clId="{971D71D3-F01A-462C-A4C9-10112751BFB5}" dt="2026-03-07T18:20:47.314" v="1057" actId="1076"/>
+          <ac:chgData name="Juan Carlos Moure Lopez" userId="2db23dd4-09f1-4b6a-9c5d-d257e5850e3c" providerId="ADAL" clId="{971D71D3-F01A-462C-A4C9-10112751BFB5}" dt="2026-03-13T10:22:11.506" v="2390" actId="1076"/>
           <ac:spMkLst>
             <pc:docMk/>
             <pc:sldMk cId="1443830565" sldId="272"/>
@@ -831,110 +857,6 @@
           <pc:docMk/>
           <pc:sldMk cId="897167500" sldId="274"/>
         </pc:sldMkLst>
-        <pc:spChg chg="del">
-          <ac:chgData name="Juan Carlos Moure Lopez" userId="2db23dd4-09f1-4b6a-9c5d-d257e5850e3c" providerId="ADAL" clId="{971D71D3-F01A-462C-A4C9-10112751BFB5}" dt="2026-03-08T16:12:38.166" v="1059" actId="478"/>
-          <ac:spMkLst>
-            <pc:docMk/>
-            <pc:sldMk cId="897167500" sldId="274"/>
-            <ac:spMk id="2" creationId="{DF6A0A15-D24E-D6C7-7D8C-81423420C8DD}"/>
-          </ac:spMkLst>
-        </pc:spChg>
-        <pc:spChg chg="del">
-          <ac:chgData name="Juan Carlos Moure Lopez" userId="2db23dd4-09f1-4b6a-9c5d-d257e5850e3c" providerId="ADAL" clId="{971D71D3-F01A-462C-A4C9-10112751BFB5}" dt="2026-03-08T16:12:41.874" v="1060" actId="478"/>
-          <ac:spMkLst>
-            <pc:docMk/>
-            <pc:sldMk cId="897167500" sldId="274"/>
-            <ac:spMk id="10" creationId="{F7A76208-FD53-648C-112B-BCEA0D6F02CC}"/>
-          </ac:spMkLst>
-        </pc:spChg>
-        <pc:spChg chg="del">
-          <ac:chgData name="Juan Carlos Moure Lopez" userId="2db23dd4-09f1-4b6a-9c5d-d257e5850e3c" providerId="ADAL" clId="{971D71D3-F01A-462C-A4C9-10112751BFB5}" dt="2026-03-08T16:12:41.874" v="1060" actId="478"/>
-          <ac:spMkLst>
-            <pc:docMk/>
-            <pc:sldMk cId="897167500" sldId="274"/>
-            <ac:spMk id="11" creationId="{1ADACA3C-0EEF-8D2E-7DEA-68F307B504CD}"/>
-          </ac:spMkLst>
-        </pc:spChg>
-        <pc:spChg chg="del">
-          <ac:chgData name="Juan Carlos Moure Lopez" userId="2db23dd4-09f1-4b6a-9c5d-d257e5850e3c" providerId="ADAL" clId="{971D71D3-F01A-462C-A4C9-10112751BFB5}" dt="2026-03-08T16:12:44.614" v="1062" actId="478"/>
-          <ac:spMkLst>
-            <pc:docMk/>
-            <pc:sldMk cId="897167500" sldId="274"/>
-            <ac:spMk id="13" creationId="{7A6C9975-F766-13CC-6850-2DFDBE5E9A9B}"/>
-          </ac:spMkLst>
-        </pc:spChg>
-        <pc:spChg chg="del">
-          <ac:chgData name="Juan Carlos Moure Lopez" userId="2db23dd4-09f1-4b6a-9c5d-d257e5850e3c" providerId="ADAL" clId="{971D71D3-F01A-462C-A4C9-10112751BFB5}" dt="2026-03-08T16:12:43.403" v="1061" actId="478"/>
-          <ac:spMkLst>
-            <pc:docMk/>
-            <pc:sldMk cId="897167500" sldId="274"/>
-            <ac:spMk id="14" creationId="{D9C06D39-763D-10B7-73A9-2D4641C1FEC6}"/>
-          </ac:spMkLst>
-        </pc:spChg>
-        <pc:spChg chg="del">
-          <ac:chgData name="Juan Carlos Moure Lopez" userId="2db23dd4-09f1-4b6a-9c5d-d257e5850e3c" providerId="ADAL" clId="{971D71D3-F01A-462C-A4C9-10112751BFB5}" dt="2026-03-08T16:12:41.874" v="1060" actId="478"/>
-          <ac:spMkLst>
-            <pc:docMk/>
-            <pc:sldMk cId="897167500" sldId="274"/>
-            <ac:spMk id="17" creationId="{93539A39-8E72-A0DD-D2E5-4752721EDE49}"/>
-          </ac:spMkLst>
-        </pc:spChg>
-        <pc:spChg chg="del">
-          <ac:chgData name="Juan Carlos Moure Lopez" userId="2db23dd4-09f1-4b6a-9c5d-d257e5850e3c" providerId="ADAL" clId="{971D71D3-F01A-462C-A4C9-10112751BFB5}" dt="2026-03-08T16:12:41.874" v="1060" actId="478"/>
-          <ac:spMkLst>
-            <pc:docMk/>
-            <pc:sldMk cId="897167500" sldId="274"/>
-            <ac:spMk id="19" creationId="{7554BE21-555E-5331-F994-88534882A135}"/>
-          </ac:spMkLst>
-        </pc:spChg>
-        <pc:spChg chg="del">
-          <ac:chgData name="Juan Carlos Moure Lopez" userId="2db23dd4-09f1-4b6a-9c5d-d257e5850e3c" providerId="ADAL" clId="{971D71D3-F01A-462C-A4C9-10112751BFB5}" dt="2026-03-08T16:12:41.874" v="1060" actId="478"/>
-          <ac:spMkLst>
-            <pc:docMk/>
-            <pc:sldMk cId="897167500" sldId="274"/>
-            <ac:spMk id="21" creationId="{58F7EA0B-DD2C-10E7-BF75-1FA251B3B9E1}"/>
-          </ac:spMkLst>
-        </pc:spChg>
-        <pc:spChg chg="del">
-          <ac:chgData name="Juan Carlos Moure Lopez" userId="2db23dd4-09f1-4b6a-9c5d-d257e5850e3c" providerId="ADAL" clId="{971D71D3-F01A-462C-A4C9-10112751BFB5}" dt="2026-03-08T16:12:41.874" v="1060" actId="478"/>
-          <ac:spMkLst>
-            <pc:docMk/>
-            <pc:sldMk cId="897167500" sldId="274"/>
-            <ac:spMk id="22" creationId="{827603A0-4B88-F533-36FF-BAA239484E21}"/>
-          </ac:spMkLst>
-        </pc:spChg>
-        <pc:spChg chg="del">
-          <ac:chgData name="Juan Carlos Moure Lopez" userId="2db23dd4-09f1-4b6a-9c5d-d257e5850e3c" providerId="ADAL" clId="{971D71D3-F01A-462C-A4C9-10112751BFB5}" dt="2026-03-08T16:12:41.874" v="1060" actId="478"/>
-          <ac:spMkLst>
-            <pc:docMk/>
-            <pc:sldMk cId="897167500" sldId="274"/>
-            <ac:spMk id="23" creationId="{233B4BA8-5B1C-B9B4-9791-95BEB766FA3C}"/>
-          </ac:spMkLst>
-        </pc:spChg>
-        <pc:spChg chg="del">
-          <ac:chgData name="Juan Carlos Moure Lopez" userId="2db23dd4-09f1-4b6a-9c5d-d257e5850e3c" providerId="ADAL" clId="{971D71D3-F01A-462C-A4C9-10112751BFB5}" dt="2026-03-08T16:12:41.874" v="1060" actId="478"/>
-          <ac:spMkLst>
-            <pc:docMk/>
-            <pc:sldMk cId="897167500" sldId="274"/>
-            <ac:spMk id="24" creationId="{042CFB5F-E62E-ADE7-1E24-3220F14E6588}"/>
-          </ac:spMkLst>
-        </pc:spChg>
-        <pc:spChg chg="del">
-          <ac:chgData name="Juan Carlos Moure Lopez" userId="2db23dd4-09f1-4b6a-9c5d-d257e5850e3c" providerId="ADAL" clId="{971D71D3-F01A-462C-A4C9-10112751BFB5}" dt="2026-03-08T16:12:41.874" v="1060" actId="478"/>
-          <ac:spMkLst>
-            <pc:docMk/>
-            <pc:sldMk cId="897167500" sldId="274"/>
-            <ac:spMk id="27" creationId="{F30AE49D-02B5-0116-DD8C-22D7D9AF314A}"/>
-          </ac:spMkLst>
-        </pc:spChg>
-        <pc:spChg chg="del">
-          <ac:chgData name="Juan Carlos Moure Lopez" userId="2db23dd4-09f1-4b6a-9c5d-d257e5850e3c" providerId="ADAL" clId="{971D71D3-F01A-462C-A4C9-10112751BFB5}" dt="2026-03-08T16:12:41.874" v="1060" actId="478"/>
-          <ac:spMkLst>
-            <pc:docMk/>
-            <pc:sldMk cId="897167500" sldId="274"/>
-            <ac:spMk id="28" creationId="{BB900035-3C50-A792-B0F9-459E13D79F0D}"/>
-          </ac:spMkLst>
-        </pc:spChg>
         <pc:picChg chg="add mod">
           <ac:chgData name="Juan Carlos Moure Lopez" userId="2db23dd4-09f1-4b6a-9c5d-d257e5850e3c" providerId="ADAL" clId="{971D71D3-F01A-462C-A4C9-10112751BFB5}" dt="2026-03-08T16:12:53.642" v="1065" actId="1076"/>
           <ac:picMkLst>
@@ -958,14 +880,6 @@
             <ac:picMk id="3" creationId="{8ADEBFCF-3EC1-D1E3-1453-B97F1056938D}"/>
           </ac:picMkLst>
         </pc:picChg>
-        <pc:picChg chg="del">
-          <ac:chgData name="Juan Carlos Moure Lopez" userId="2db23dd4-09f1-4b6a-9c5d-d257e5850e3c" providerId="ADAL" clId="{971D71D3-F01A-462C-A4C9-10112751BFB5}" dt="2026-03-08T16:30:51.971" v="1067" actId="478"/>
-          <ac:picMkLst>
-            <pc:docMk/>
-            <pc:sldMk cId="1471106890" sldId="275"/>
-            <ac:picMk id="16" creationId="{0A4619A2-3448-8A4F-5E8B-4B5CECA9B138}"/>
-          </ac:picMkLst>
-        </pc:picChg>
       </pc:sldChg>
       <pc:sldChg chg="addSp delSp add mod">
         <pc:chgData name="Juan Carlos Moure Lopez" userId="2db23dd4-09f1-4b6a-9c5d-d257e5850e3c" providerId="ADAL" clId="{971D71D3-F01A-462C-A4C9-10112751BFB5}" dt="2026-03-08T16:44:40.463" v="1071" actId="22"/>
@@ -973,14 +887,6 @@
           <pc:docMk/>
           <pc:sldMk cId="2459704666" sldId="276"/>
         </pc:sldMkLst>
-        <pc:picChg chg="del">
-          <ac:chgData name="Juan Carlos Moure Lopez" userId="2db23dd4-09f1-4b6a-9c5d-d257e5850e3c" providerId="ADAL" clId="{971D71D3-F01A-462C-A4C9-10112751BFB5}" dt="2026-03-08T16:31:06.966" v="1070" actId="478"/>
-          <ac:picMkLst>
-            <pc:docMk/>
-            <pc:sldMk cId="2459704666" sldId="276"/>
-            <ac:picMk id="3" creationId="{1B04B509-44E2-B68C-0910-59A9357926DD}"/>
-          </ac:picMkLst>
-        </pc:picChg>
         <pc:picChg chg="add">
           <ac:chgData name="Juan Carlos Moure Lopez" userId="2db23dd4-09f1-4b6a-9c5d-d257e5850e3c" providerId="ADAL" clId="{971D71D3-F01A-462C-A4C9-10112751BFB5}" dt="2026-03-08T16:44:40.463" v="1071" actId="22"/>
           <ac:picMkLst>
@@ -1004,14 +910,6 @@
             <ac:picMk id="3" creationId="{72A67A32-A5D2-7B5D-F390-35418D70F063}"/>
           </ac:picMkLst>
         </pc:picChg>
-        <pc:picChg chg="del">
-          <ac:chgData name="Juan Carlos Moure Lopez" userId="2db23dd4-09f1-4b6a-9c5d-d257e5850e3c" providerId="ADAL" clId="{971D71D3-F01A-462C-A4C9-10112751BFB5}" dt="2026-03-08T16:52:49.749" v="1073" actId="478"/>
-          <ac:picMkLst>
-            <pc:docMk/>
-            <pc:sldMk cId="473431662" sldId="277"/>
-            <ac:picMk id="4" creationId="{37DDC71F-5ECE-1238-A17D-992D41BA2AE8}"/>
-          </ac:picMkLst>
-        </pc:picChg>
       </pc:sldChg>
       <pc:sldChg chg="addSp delSp modSp add mod">
         <pc:chgData name="Juan Carlos Moure Lopez" userId="2db23dd4-09f1-4b6a-9c5d-d257e5850e3c" providerId="ADAL" clId="{971D71D3-F01A-462C-A4C9-10112751BFB5}" dt="2026-03-08T22:22:32.025" v="1093" actId="1035"/>
@@ -1019,14 +917,6 @@
           <pc:docMk/>
           <pc:sldMk cId="251131961" sldId="278"/>
         </pc:sldMkLst>
-        <pc:picChg chg="del">
-          <ac:chgData name="Juan Carlos Moure Lopez" userId="2db23dd4-09f1-4b6a-9c5d-d257e5850e3c" providerId="ADAL" clId="{971D71D3-F01A-462C-A4C9-10112751BFB5}" dt="2026-03-08T22:22:07.272" v="1076" actId="478"/>
-          <ac:picMkLst>
-            <pc:docMk/>
-            <pc:sldMk cId="251131961" sldId="278"/>
-            <ac:picMk id="3" creationId="{3848C3B3-B010-41B7-FD3E-931FBBD6B3B6}"/>
-          </ac:picMkLst>
-        </pc:picChg>
         <pc:picChg chg="add mod modCrop">
           <ac:chgData name="Juan Carlos Moure Lopez" userId="2db23dd4-09f1-4b6a-9c5d-d257e5850e3c" providerId="ADAL" clId="{971D71D3-F01A-462C-A4C9-10112751BFB5}" dt="2026-03-08T22:22:32.025" v="1093" actId="1035"/>
           <ac:picMkLst>
@@ -1035,6 +925,140 @@
             <ac:picMk id="4" creationId="{5ED3E121-8BD3-E80C-B07B-68D478B6AD4A}"/>
           </ac:picMkLst>
         </pc:picChg>
+      </pc:sldChg>
+      <pc:sldChg chg="addSp delSp modSp add mod ord delAnim">
+        <pc:chgData name="Juan Carlos Moure Lopez" userId="2db23dd4-09f1-4b6a-9c5d-d257e5850e3c" providerId="ADAL" clId="{971D71D3-F01A-462C-A4C9-10112751BFB5}" dt="2026-03-13T10:16:28.093" v="2106" actId="20577"/>
+        <pc:sldMkLst>
+          <pc:docMk/>
+          <pc:sldMk cId="1627150776" sldId="279"/>
+        </pc:sldMkLst>
+        <pc:spChg chg="add del mod">
+          <ac:chgData name="Juan Carlos Moure Lopez" userId="2db23dd4-09f1-4b6a-9c5d-d257e5850e3c" providerId="ADAL" clId="{971D71D3-F01A-462C-A4C9-10112751BFB5}" dt="2026-03-13T10:01:19.296" v="1560" actId="14100"/>
+          <ac:spMkLst>
+            <pc:docMk/>
+            <pc:sldMk cId="1627150776" sldId="279"/>
+            <ac:spMk id="2" creationId="{6FA10E7E-986D-1F27-FDE7-67175E5C2D6A}"/>
+          </ac:spMkLst>
+        </pc:spChg>
+        <pc:spChg chg="add mod">
+          <ac:chgData name="Juan Carlos Moure Lopez" userId="2db23dd4-09f1-4b6a-9c5d-d257e5850e3c" providerId="ADAL" clId="{971D71D3-F01A-462C-A4C9-10112751BFB5}" dt="2026-03-13T10:10:29.876" v="1852" actId="20577"/>
+          <ac:spMkLst>
+            <pc:docMk/>
+            <pc:sldMk cId="1627150776" sldId="279"/>
+            <ac:spMk id="8" creationId="{386D838D-A5BB-A7D3-0F13-D1B138307BFC}"/>
+          </ac:spMkLst>
+        </pc:spChg>
+        <pc:spChg chg="del">
+          <ac:chgData name="Juan Carlos Moure Lopez" userId="2db23dd4-09f1-4b6a-9c5d-d257e5850e3c" providerId="ADAL" clId="{971D71D3-F01A-462C-A4C9-10112751BFB5}" dt="2026-03-13T09:56:25.096" v="1098" actId="478"/>
+          <ac:spMkLst>
+            <pc:docMk/>
+            <pc:sldMk cId="1627150776" sldId="279"/>
+            <ac:spMk id="9" creationId="{C4C420A4-D60E-94FA-9EDF-76ED4E60D8F1}"/>
+          </ac:spMkLst>
+        </pc:spChg>
+        <pc:spChg chg="mod">
+          <ac:chgData name="Juan Carlos Moure Lopez" userId="2db23dd4-09f1-4b6a-9c5d-d257e5850e3c" providerId="ADAL" clId="{971D71D3-F01A-462C-A4C9-10112751BFB5}" dt="2026-03-13T10:10:38.299" v="1853" actId="1076"/>
+          <ac:spMkLst>
+            <pc:docMk/>
+            <pc:sldMk cId="1627150776" sldId="279"/>
+            <ac:spMk id="11" creationId="{FBB72015-FE64-C77A-5A0F-7979F59D70B1}"/>
+          </ac:spMkLst>
+        </pc:spChg>
+        <pc:spChg chg="mod">
+          <ac:chgData name="Juan Carlos Moure Lopez" userId="2db23dd4-09f1-4b6a-9c5d-d257e5850e3c" providerId="ADAL" clId="{971D71D3-F01A-462C-A4C9-10112751BFB5}" dt="2026-03-13T10:16:28.093" v="2106" actId="20577"/>
+          <ac:spMkLst>
+            <pc:docMk/>
+            <pc:sldMk cId="1627150776" sldId="279"/>
+            <ac:spMk id="12" creationId="{9DBC2E79-2E0C-C626-2A58-DFE431DE506D}"/>
+          </ac:spMkLst>
+        </pc:spChg>
+        <pc:spChg chg="add mod">
+          <ac:chgData name="Juan Carlos Moure Lopez" userId="2db23dd4-09f1-4b6a-9c5d-d257e5850e3c" providerId="ADAL" clId="{971D71D3-F01A-462C-A4C9-10112751BFB5}" dt="2026-03-13T10:11:33.109" v="1862" actId="14100"/>
+          <ac:spMkLst>
+            <pc:docMk/>
+            <pc:sldMk cId="1627150776" sldId="279"/>
+            <ac:spMk id="15" creationId="{A434385C-152A-9DAA-6BAC-F6270A62B567}"/>
+          </ac:spMkLst>
+        </pc:spChg>
+        <pc:spChg chg="add mod">
+          <ac:chgData name="Juan Carlos Moure Lopez" userId="2db23dd4-09f1-4b6a-9c5d-d257e5850e3c" providerId="ADAL" clId="{971D71D3-F01A-462C-A4C9-10112751BFB5}" dt="2026-03-13T10:16:14.128" v="2078" actId="20577"/>
+          <ac:spMkLst>
+            <pc:docMk/>
+            <pc:sldMk cId="1627150776" sldId="279"/>
+            <ac:spMk id="16" creationId="{960B9A8C-23A8-790B-4378-11AEDE1A4FCA}"/>
+          </ac:spMkLst>
+        </pc:spChg>
+        <pc:spChg chg="add mod">
+          <ac:chgData name="Juan Carlos Moure Lopez" userId="2db23dd4-09f1-4b6a-9c5d-d257e5850e3c" providerId="ADAL" clId="{971D71D3-F01A-462C-A4C9-10112751BFB5}" dt="2026-03-13T10:11:22.341" v="1860" actId="14100"/>
+          <ac:spMkLst>
+            <pc:docMk/>
+            <pc:sldMk cId="1627150776" sldId="279"/>
+            <ac:spMk id="18" creationId="{F50ADA6F-FE03-703E-8F6E-16E62F2977D2}"/>
+          </ac:spMkLst>
+        </pc:spChg>
+        <pc:spChg chg="add mod">
+          <ac:chgData name="Juan Carlos Moure Lopez" userId="2db23dd4-09f1-4b6a-9c5d-d257e5850e3c" providerId="ADAL" clId="{971D71D3-F01A-462C-A4C9-10112751BFB5}" dt="2026-03-13T10:12:03.199" v="1869" actId="14100"/>
+          <ac:spMkLst>
+            <pc:docMk/>
+            <pc:sldMk cId="1627150776" sldId="279"/>
+            <ac:spMk id="19" creationId="{7AFABC02-D7FF-B30D-EBF8-84D3DF4DE037}"/>
+          </ac:spMkLst>
+        </pc:spChg>
+        <pc:spChg chg="add mod">
+          <ac:chgData name="Juan Carlos Moure Lopez" userId="2db23dd4-09f1-4b6a-9c5d-d257e5850e3c" providerId="ADAL" clId="{971D71D3-F01A-462C-A4C9-10112751BFB5}" dt="2026-03-13T10:12:24.583" v="1873" actId="14100"/>
+          <ac:spMkLst>
+            <pc:docMk/>
+            <pc:sldMk cId="1627150776" sldId="279"/>
+            <ac:spMk id="20" creationId="{BEA352C5-2979-F085-6D79-10A3CFB8C9A3}"/>
+          </ac:spMkLst>
+        </pc:spChg>
+        <pc:picChg chg="del">
+          <ac:chgData name="Juan Carlos Moure Lopez" userId="2db23dd4-09f1-4b6a-9c5d-d257e5850e3c" providerId="ADAL" clId="{971D71D3-F01A-462C-A4C9-10112751BFB5}" dt="2026-03-13T10:02:47.840" v="1597" actId="478"/>
+          <ac:picMkLst>
+            <pc:docMk/>
+            <pc:sldMk cId="1627150776" sldId="279"/>
+            <ac:picMk id="14" creationId="{09C42C32-7C4D-6497-C87E-EBEC49C2C212}"/>
+          </ac:picMkLst>
+        </pc:picChg>
+        <pc:picChg chg="add del">
+          <ac:chgData name="Juan Carlos Moure Lopez" userId="2db23dd4-09f1-4b6a-9c5d-d257e5850e3c" providerId="ADAL" clId="{971D71D3-F01A-462C-A4C9-10112751BFB5}" dt="2026-03-13T10:11:04.456" v="1855" actId="478"/>
+          <ac:picMkLst>
+            <pc:docMk/>
+            <pc:sldMk cId="1627150776" sldId="279"/>
+            <ac:picMk id="17" creationId="{F5DBACD2-8135-AE45-6D41-C5A50A2D0460}"/>
+          </ac:picMkLst>
+        </pc:picChg>
+        <pc:cxnChg chg="add mod">
+          <ac:chgData name="Juan Carlos Moure Lopez" userId="2db23dd4-09f1-4b6a-9c5d-d257e5850e3c" providerId="ADAL" clId="{971D71D3-F01A-462C-A4C9-10112751BFB5}" dt="2026-03-13T10:01:58.312" v="1571" actId="1035"/>
+          <ac:cxnSpMkLst>
+            <pc:docMk/>
+            <pc:sldMk cId="1627150776" sldId="279"/>
+            <ac:cxnSpMk id="4" creationId="{F1379FE6-9BED-883F-8FEB-9AFE3695C170}"/>
+          </ac:cxnSpMkLst>
+        </pc:cxnChg>
+        <pc:cxnChg chg="add mod">
+          <ac:chgData name="Juan Carlos Moure Lopez" userId="2db23dd4-09f1-4b6a-9c5d-d257e5850e3c" providerId="ADAL" clId="{971D71D3-F01A-462C-A4C9-10112751BFB5}" dt="2026-03-13T10:02:26.278" v="1593" actId="1035"/>
+          <ac:cxnSpMkLst>
+            <pc:docMk/>
+            <pc:sldMk cId="1627150776" sldId="279"/>
+            <ac:cxnSpMk id="5" creationId="{0B5AB8D0-0583-23EF-ECAB-568218C02AA7}"/>
+          </ac:cxnSpMkLst>
+        </pc:cxnChg>
+        <pc:cxnChg chg="add mod">
+          <ac:chgData name="Juan Carlos Moure Lopez" userId="2db23dd4-09f1-4b6a-9c5d-d257e5850e3c" providerId="ADAL" clId="{971D71D3-F01A-462C-A4C9-10112751BFB5}" dt="2026-03-13T10:05:39.651" v="1632" actId="208"/>
+          <ac:cxnSpMkLst>
+            <pc:docMk/>
+            <pc:sldMk cId="1627150776" sldId="279"/>
+            <ac:cxnSpMk id="6" creationId="{EB965F3B-F94D-F86C-9340-AA8349194994}"/>
+          </ac:cxnSpMkLst>
+        </pc:cxnChg>
+      </pc:sldChg>
+      <pc:sldChg chg="add">
+        <pc:chgData name="Juan Carlos Moure Lopez" userId="2db23dd4-09f1-4b6a-9c5d-d257e5850e3c" providerId="ADAL" clId="{971D71D3-F01A-462C-A4C9-10112751BFB5}" dt="2026-03-13T10:07:30.663" v="1664" actId="2890"/>
+        <pc:sldMkLst>
+          <pc:docMk/>
+          <pc:sldMk cId="4274819867" sldId="280"/>
+        </pc:sldMkLst>
       </pc:sldChg>
       <pc:sldMasterChg chg="delSldLayout">
         <pc:chgData name="Juan Carlos Moure Lopez" userId="2db23dd4-09f1-4b6a-9c5d-d257e5850e3c" providerId="ADAL" clId="{971D71D3-F01A-462C-A4C9-10112751BFB5}" dt="2026-02-28T09:02:50.809" v="14" actId="47"/>
@@ -1598,6 +1622,276 @@
 </p:notes>
 </file>
 
+<file path=ppt/notesSlides/notesSlide10.xml><?xml version="1.0" encoding="utf-8"?>
+<p:notes xmlns:a="http://schemas.openxmlformats.org/drawingml/2006/main" xmlns:r="http://schemas.openxmlformats.org/officeDocument/2006/relationships" xmlns:p="http://schemas.openxmlformats.org/presentationml/2006/main" showMasterSp="0" showMasterPhAnim="0">
+  <p:cSld>
+    <p:spTree>
+      <p:nvGrpSpPr>
+        <p:cNvPr id="1" name="Shape 136">
+          <a:extLst>
+            <a:ext uri="{FF2B5EF4-FFF2-40B4-BE49-F238E27FC236}">
+              <a16:creationId xmlns:a16="http://schemas.microsoft.com/office/drawing/2014/main" id="{57F24907-8A5B-9E2E-447E-22571D493086}"/>
+            </a:ext>
+          </a:extLst>
+        </p:cNvPr>
+        <p:cNvGrpSpPr/>
+        <p:nvPr/>
+      </p:nvGrpSpPr>
+      <p:grpSpPr>
+        <a:xfrm>
+          <a:off x="0" y="0"/>
+          <a:ext cx="0" cy="0"/>
+          <a:chOff x="0" y="0"/>
+          <a:chExt cx="0" cy="0"/>
+        </a:xfrm>
+      </p:grpSpPr>
+      <p:sp>
+        <p:nvSpPr>
+          <p:cNvPr id="137" name="Google Shape;137;g2e840c0e919_0_357:notes">
+            <a:extLst>
+              <a:ext uri="{FF2B5EF4-FFF2-40B4-BE49-F238E27FC236}">
+                <a16:creationId xmlns:a16="http://schemas.microsoft.com/office/drawing/2014/main" id="{31ECDD7B-6148-CD75-BB28-F03200ED2F91}"/>
+              </a:ext>
+            </a:extLst>
+          </p:cNvPr>
+          <p:cNvSpPr>
+            <a:spLocks noGrp="1" noRot="1" noChangeAspect="1"/>
+          </p:cNvSpPr>
+          <p:nvPr>
+            <p:ph type="sldImg" idx="2"/>
+          </p:nvPr>
+        </p:nvSpPr>
+        <p:spPr>
+          <a:xfrm>
+            <a:off x="381000" y="685800"/>
+            <a:ext cx="6096000" cy="3429000"/>
+          </a:xfrm>
+          <a:custGeom>
+            <a:avLst/>
+            <a:gdLst/>
+            <a:ahLst/>
+            <a:cxnLst/>
+            <a:rect l="l" t="t" r="r" b="b"/>
+            <a:pathLst>
+              <a:path w="120000" h="120000" extrusionOk="0">
+                <a:moveTo>
+                  <a:pt x="0" y="0"/>
+                </a:moveTo>
+                <a:lnTo>
+                  <a:pt x="120000" y="0"/>
+                </a:lnTo>
+                <a:lnTo>
+                  <a:pt x="120000" y="120000"/>
+                </a:lnTo>
+                <a:lnTo>
+                  <a:pt x="0" y="120000"/>
+                </a:lnTo>
+                <a:close/>
+              </a:path>
+            </a:pathLst>
+          </a:custGeom>
+        </p:spPr>
+      </p:sp>
+      <p:sp>
+        <p:nvSpPr>
+          <p:cNvPr id="138" name="Google Shape;138;g2e840c0e919_0_357:notes">
+            <a:extLst>
+              <a:ext uri="{FF2B5EF4-FFF2-40B4-BE49-F238E27FC236}">
+                <a16:creationId xmlns:a16="http://schemas.microsoft.com/office/drawing/2014/main" id="{37FA97CA-D99C-9271-D605-2AAF37179E96}"/>
+              </a:ext>
+            </a:extLst>
+          </p:cNvPr>
+          <p:cNvSpPr txBox="1">
+            <a:spLocks noGrp="1"/>
+          </p:cNvSpPr>
+          <p:nvPr>
+            <p:ph type="body" idx="1"/>
+          </p:nvPr>
+        </p:nvSpPr>
+        <p:spPr>
+          <a:xfrm>
+            <a:off x="685800" y="4343400"/>
+            <a:ext cx="5486400" cy="4114800"/>
+          </a:xfrm>
+          <a:prstGeom prst="rect">
+            <a:avLst/>
+          </a:prstGeom>
+        </p:spPr>
+        <p:txBody>
+          <a:bodyPr spcFirstLastPara="1" wrap="square" lIns="91425" tIns="91425" rIns="91425" bIns="91425" anchor="t" anchorCtr="0">
+            <a:noAutofit/>
+          </a:bodyPr>
+          <a:lstStyle/>
+          <a:p>
+            <a:pPr marL="0" lvl="0" indent="0" algn="just" rtl="0">
+              <a:lnSpc>
+                <a:spcPct val="115000"/>
+              </a:lnSpc>
+              <a:spcBef>
+                <a:spcPts val="0"/>
+              </a:spcBef>
+              <a:spcAft>
+                <a:spcPts val="0"/>
+              </a:spcAft>
+              <a:buClr>
+                <a:schemeClr val="dk1"/>
+              </a:buClr>
+              <a:buSzPts val="1100"/>
+              <a:buFont typeface="Arial"/>
+              <a:buNone/>
+            </a:pPr>
+            <a:endParaRPr dirty="0"/>
+          </a:p>
+        </p:txBody>
+      </p:sp>
+    </p:spTree>
+    <p:extLst>
+      <p:ext uri="{BB962C8B-B14F-4D97-AF65-F5344CB8AC3E}">
+        <p14:creationId xmlns:p14="http://schemas.microsoft.com/office/powerpoint/2010/main" val="3091672263"/>
+      </p:ext>
+    </p:extLst>
+  </p:cSld>
+  <p:clrMapOvr>
+    <a:masterClrMapping/>
+  </p:clrMapOvr>
+</p:notes>
+</file>
+
+<file path=ppt/notesSlides/notesSlide11.xml><?xml version="1.0" encoding="utf-8"?>
+<p:notes xmlns:a="http://schemas.openxmlformats.org/drawingml/2006/main" xmlns:r="http://schemas.openxmlformats.org/officeDocument/2006/relationships" xmlns:p="http://schemas.openxmlformats.org/presentationml/2006/main" showMasterSp="0" showMasterPhAnim="0">
+  <p:cSld>
+    <p:spTree>
+      <p:nvGrpSpPr>
+        <p:cNvPr id="1" name="Shape 136">
+          <a:extLst>
+            <a:ext uri="{FF2B5EF4-FFF2-40B4-BE49-F238E27FC236}">
+              <a16:creationId xmlns:a16="http://schemas.microsoft.com/office/drawing/2014/main" id="{D860E551-FCB9-6C85-F660-7DE1D39977AB}"/>
+            </a:ext>
+          </a:extLst>
+        </p:cNvPr>
+        <p:cNvGrpSpPr/>
+        <p:nvPr/>
+      </p:nvGrpSpPr>
+      <p:grpSpPr>
+        <a:xfrm>
+          <a:off x="0" y="0"/>
+          <a:ext cx="0" cy="0"/>
+          <a:chOff x="0" y="0"/>
+          <a:chExt cx="0" cy="0"/>
+        </a:xfrm>
+      </p:grpSpPr>
+      <p:sp>
+        <p:nvSpPr>
+          <p:cNvPr id="137" name="Google Shape;137;g2e840c0e919_0_357:notes">
+            <a:extLst>
+              <a:ext uri="{FF2B5EF4-FFF2-40B4-BE49-F238E27FC236}">
+                <a16:creationId xmlns:a16="http://schemas.microsoft.com/office/drawing/2014/main" id="{D0874D3A-92AD-9849-59A7-BD06D3AEC64A}"/>
+              </a:ext>
+            </a:extLst>
+          </p:cNvPr>
+          <p:cNvSpPr>
+            <a:spLocks noGrp="1" noRot="1" noChangeAspect="1"/>
+          </p:cNvSpPr>
+          <p:nvPr>
+            <p:ph type="sldImg" idx="2"/>
+          </p:nvPr>
+        </p:nvSpPr>
+        <p:spPr>
+          <a:xfrm>
+            <a:off x="381000" y="685800"/>
+            <a:ext cx="6096000" cy="3429000"/>
+          </a:xfrm>
+          <a:custGeom>
+            <a:avLst/>
+            <a:gdLst/>
+            <a:ahLst/>
+            <a:cxnLst/>
+            <a:rect l="l" t="t" r="r" b="b"/>
+            <a:pathLst>
+              <a:path w="120000" h="120000" extrusionOk="0">
+                <a:moveTo>
+                  <a:pt x="0" y="0"/>
+                </a:moveTo>
+                <a:lnTo>
+                  <a:pt x="120000" y="0"/>
+                </a:lnTo>
+                <a:lnTo>
+                  <a:pt x="120000" y="120000"/>
+                </a:lnTo>
+                <a:lnTo>
+                  <a:pt x="0" y="120000"/>
+                </a:lnTo>
+                <a:close/>
+              </a:path>
+            </a:pathLst>
+          </a:custGeom>
+        </p:spPr>
+      </p:sp>
+      <p:sp>
+        <p:nvSpPr>
+          <p:cNvPr id="138" name="Google Shape;138;g2e840c0e919_0_357:notes">
+            <a:extLst>
+              <a:ext uri="{FF2B5EF4-FFF2-40B4-BE49-F238E27FC236}">
+                <a16:creationId xmlns:a16="http://schemas.microsoft.com/office/drawing/2014/main" id="{6A1A301C-C991-E502-6551-FBA1AE7C0781}"/>
+              </a:ext>
+            </a:extLst>
+          </p:cNvPr>
+          <p:cNvSpPr txBox="1">
+            <a:spLocks noGrp="1"/>
+          </p:cNvSpPr>
+          <p:nvPr>
+            <p:ph type="body" idx="1"/>
+          </p:nvPr>
+        </p:nvSpPr>
+        <p:spPr>
+          <a:xfrm>
+            <a:off x="685800" y="4343400"/>
+            <a:ext cx="5486400" cy="4114800"/>
+          </a:xfrm>
+          <a:prstGeom prst="rect">
+            <a:avLst/>
+          </a:prstGeom>
+        </p:spPr>
+        <p:txBody>
+          <a:bodyPr spcFirstLastPara="1" wrap="square" lIns="91425" tIns="91425" rIns="91425" bIns="91425" anchor="t" anchorCtr="0">
+            <a:noAutofit/>
+          </a:bodyPr>
+          <a:lstStyle/>
+          <a:p>
+            <a:pPr marL="0" lvl="0" indent="0" algn="just" rtl="0">
+              <a:lnSpc>
+                <a:spcPct val="115000"/>
+              </a:lnSpc>
+              <a:spcBef>
+                <a:spcPts val="0"/>
+              </a:spcBef>
+              <a:spcAft>
+                <a:spcPts val="0"/>
+              </a:spcAft>
+              <a:buClr>
+                <a:schemeClr val="dk1"/>
+              </a:buClr>
+              <a:buSzPts val="1100"/>
+              <a:buFont typeface="Arial"/>
+              <a:buNone/>
+            </a:pPr>
+            <a:endParaRPr dirty="0"/>
+          </a:p>
+        </p:txBody>
+      </p:sp>
+    </p:spTree>
+    <p:extLst>
+      <p:ext uri="{BB962C8B-B14F-4D97-AF65-F5344CB8AC3E}">
+        <p14:creationId xmlns:p14="http://schemas.microsoft.com/office/powerpoint/2010/main" val="4281904472"/>
+      </p:ext>
+    </p:extLst>
+  </p:cSld>
+  <p:clrMapOvr>
+    <a:masterClrMapping/>
+  </p:clrMapOvr>
+</p:notes>
+</file>
+
 <file path=ppt/notesSlides/notesSlide2.xml><?xml version="1.0" encoding="utf-8"?>
 <p:notes xmlns:a="http://schemas.openxmlformats.org/drawingml/2006/main" xmlns:r="http://schemas.openxmlformats.org/officeDocument/2006/relationships" xmlns:p="http://schemas.openxmlformats.org/presentationml/2006/main" showMasterSp="0" showMasterPhAnim="0">
   <p:cSld>
@@ -1988,6 +2282,141 @@
         <p:cNvPr id="1" name="Shape 136">
           <a:extLst>
             <a:ext uri="{FF2B5EF4-FFF2-40B4-BE49-F238E27FC236}">
+              <a16:creationId xmlns:a16="http://schemas.microsoft.com/office/drawing/2014/main" id="{37888F5C-AE27-159E-7E78-9DA161CF2C58}"/>
+            </a:ext>
+          </a:extLst>
+        </p:cNvPr>
+        <p:cNvGrpSpPr/>
+        <p:nvPr/>
+      </p:nvGrpSpPr>
+      <p:grpSpPr>
+        <a:xfrm>
+          <a:off x="0" y="0"/>
+          <a:ext cx="0" cy="0"/>
+          <a:chOff x="0" y="0"/>
+          <a:chExt cx="0" cy="0"/>
+        </a:xfrm>
+      </p:grpSpPr>
+      <p:sp>
+        <p:nvSpPr>
+          <p:cNvPr id="137" name="Google Shape;137;g2e840c0e919_0_357:notes">
+            <a:extLst>
+              <a:ext uri="{FF2B5EF4-FFF2-40B4-BE49-F238E27FC236}">
+                <a16:creationId xmlns:a16="http://schemas.microsoft.com/office/drawing/2014/main" id="{99C26C9A-35E7-79A0-5A5E-AD61F49CA0E4}"/>
+              </a:ext>
+            </a:extLst>
+          </p:cNvPr>
+          <p:cNvSpPr>
+            <a:spLocks noGrp="1" noRot="1" noChangeAspect="1"/>
+          </p:cNvSpPr>
+          <p:nvPr>
+            <p:ph type="sldImg" idx="2"/>
+          </p:nvPr>
+        </p:nvSpPr>
+        <p:spPr>
+          <a:xfrm>
+            <a:off x="381000" y="685800"/>
+            <a:ext cx="6096000" cy="3429000"/>
+          </a:xfrm>
+          <a:custGeom>
+            <a:avLst/>
+            <a:gdLst/>
+            <a:ahLst/>
+            <a:cxnLst/>
+            <a:rect l="l" t="t" r="r" b="b"/>
+            <a:pathLst>
+              <a:path w="120000" h="120000" extrusionOk="0">
+                <a:moveTo>
+                  <a:pt x="0" y="0"/>
+                </a:moveTo>
+                <a:lnTo>
+                  <a:pt x="120000" y="0"/>
+                </a:lnTo>
+                <a:lnTo>
+                  <a:pt x="120000" y="120000"/>
+                </a:lnTo>
+                <a:lnTo>
+                  <a:pt x="0" y="120000"/>
+                </a:lnTo>
+                <a:close/>
+              </a:path>
+            </a:pathLst>
+          </a:custGeom>
+        </p:spPr>
+      </p:sp>
+      <p:sp>
+        <p:nvSpPr>
+          <p:cNvPr id="138" name="Google Shape;138;g2e840c0e919_0_357:notes">
+            <a:extLst>
+              <a:ext uri="{FF2B5EF4-FFF2-40B4-BE49-F238E27FC236}">
+                <a16:creationId xmlns:a16="http://schemas.microsoft.com/office/drawing/2014/main" id="{FD7C4EE8-ACA3-973B-1703-12DD8A43E182}"/>
+              </a:ext>
+            </a:extLst>
+          </p:cNvPr>
+          <p:cNvSpPr txBox="1">
+            <a:spLocks noGrp="1"/>
+          </p:cNvSpPr>
+          <p:nvPr>
+            <p:ph type="body" idx="1"/>
+          </p:nvPr>
+        </p:nvSpPr>
+        <p:spPr>
+          <a:xfrm>
+            <a:off x="685800" y="4343400"/>
+            <a:ext cx="5486400" cy="4114800"/>
+          </a:xfrm>
+          <a:prstGeom prst="rect">
+            <a:avLst/>
+          </a:prstGeom>
+        </p:spPr>
+        <p:txBody>
+          <a:bodyPr spcFirstLastPara="1" wrap="square" lIns="91425" tIns="91425" rIns="91425" bIns="91425" anchor="t" anchorCtr="0">
+            <a:noAutofit/>
+          </a:bodyPr>
+          <a:lstStyle/>
+          <a:p>
+            <a:pPr marL="0" lvl="0" indent="0" algn="just" rtl="0">
+              <a:lnSpc>
+                <a:spcPct val="115000"/>
+              </a:lnSpc>
+              <a:spcBef>
+                <a:spcPts val="0"/>
+              </a:spcBef>
+              <a:spcAft>
+                <a:spcPts val="0"/>
+              </a:spcAft>
+              <a:buClr>
+                <a:schemeClr val="dk1"/>
+              </a:buClr>
+              <a:buSzPts val="1100"/>
+              <a:buFont typeface="Arial"/>
+              <a:buNone/>
+            </a:pPr>
+            <a:endParaRPr dirty="0"/>
+          </a:p>
+        </p:txBody>
+      </p:sp>
+    </p:spTree>
+    <p:extLst>
+      <p:ext uri="{BB962C8B-B14F-4D97-AF65-F5344CB8AC3E}">
+        <p14:creationId xmlns:p14="http://schemas.microsoft.com/office/powerpoint/2010/main" val="1858462042"/>
+      </p:ext>
+    </p:extLst>
+  </p:cSld>
+  <p:clrMapOvr>
+    <a:masterClrMapping/>
+  </p:clrMapOvr>
+</p:notes>
+</file>
+
+<file path=ppt/notesSlides/notesSlide6.xml><?xml version="1.0" encoding="utf-8"?>
+<p:notes xmlns:a="http://schemas.openxmlformats.org/drawingml/2006/main" xmlns:r="http://schemas.openxmlformats.org/officeDocument/2006/relationships" xmlns:p="http://schemas.openxmlformats.org/presentationml/2006/main" showMasterSp="0" showMasterPhAnim="0">
+  <p:cSld>
+    <p:spTree>
+      <p:nvGrpSpPr>
+        <p:cNvPr id="1" name="Shape 136">
+          <a:extLst>
+            <a:ext uri="{FF2B5EF4-FFF2-40B4-BE49-F238E27FC236}">
               <a16:creationId xmlns:a16="http://schemas.microsoft.com/office/drawing/2014/main" id="{3D59FE66-8378-1DD4-66CF-F4F07EE02A2C}"/>
             </a:ext>
           </a:extLst>
@@ -2115,7 +2544,7 @@
 </p:notes>
 </file>
 
-<file path=ppt/notesSlides/notesSlide6.xml><?xml version="1.0" encoding="utf-8"?>
+<file path=ppt/notesSlides/notesSlide7.xml><?xml version="1.0" encoding="utf-8"?>
 <p:notes xmlns:a="http://schemas.openxmlformats.org/drawingml/2006/main" xmlns:r="http://schemas.openxmlformats.org/officeDocument/2006/relationships" xmlns:p="http://schemas.openxmlformats.org/presentationml/2006/main" showMasterSp="0" showMasterPhAnim="0">
   <p:cSld>
     <p:spTree>
@@ -2250,7 +2679,7 @@
 </p:notes>
 </file>
 
-<file path=ppt/notesSlides/notesSlide7.xml><?xml version="1.0" encoding="utf-8"?>
+<file path=ppt/notesSlides/notesSlide8.xml><?xml version="1.0" encoding="utf-8"?>
 <p:notes xmlns:a="http://schemas.openxmlformats.org/drawingml/2006/main" xmlns:r="http://schemas.openxmlformats.org/officeDocument/2006/relationships" xmlns:p="http://schemas.openxmlformats.org/presentationml/2006/main" showMasterSp="0" showMasterPhAnim="0">
   <p:cSld>
     <p:spTree>
@@ -2385,7 +2814,7 @@
 </p:notes>
 </file>
 
-<file path=ppt/notesSlides/notesSlide8.xml><?xml version="1.0" encoding="utf-8"?>
+<file path=ppt/notesSlides/notesSlide9.xml><?xml version="1.0" encoding="utf-8"?>
 <p:notes xmlns:a="http://schemas.openxmlformats.org/drawingml/2006/main" xmlns:r="http://schemas.openxmlformats.org/officeDocument/2006/relationships" xmlns:p="http://schemas.openxmlformats.org/presentationml/2006/main" showMasterSp="0" showMasterPhAnim="0">
   <p:cSld>
     <p:spTree>
@@ -2511,141 +2940,6 @@
     <p:extLst>
       <p:ext uri="{BB962C8B-B14F-4D97-AF65-F5344CB8AC3E}">
         <p14:creationId xmlns:p14="http://schemas.microsoft.com/office/powerpoint/2010/main" val="2287749163"/>
-      </p:ext>
-    </p:extLst>
-  </p:cSld>
-  <p:clrMapOvr>
-    <a:masterClrMapping/>
-  </p:clrMapOvr>
-</p:notes>
-</file>
-
-<file path=ppt/notesSlides/notesSlide9.xml><?xml version="1.0" encoding="utf-8"?>
-<p:notes xmlns:a="http://schemas.openxmlformats.org/drawingml/2006/main" xmlns:r="http://schemas.openxmlformats.org/officeDocument/2006/relationships" xmlns:p="http://schemas.openxmlformats.org/presentationml/2006/main" showMasterSp="0" showMasterPhAnim="0">
-  <p:cSld>
-    <p:spTree>
-      <p:nvGrpSpPr>
-        <p:cNvPr id="1" name="Shape 136">
-          <a:extLst>
-            <a:ext uri="{FF2B5EF4-FFF2-40B4-BE49-F238E27FC236}">
-              <a16:creationId xmlns:a16="http://schemas.microsoft.com/office/drawing/2014/main" id="{57F24907-8A5B-9E2E-447E-22571D493086}"/>
-            </a:ext>
-          </a:extLst>
-        </p:cNvPr>
-        <p:cNvGrpSpPr/>
-        <p:nvPr/>
-      </p:nvGrpSpPr>
-      <p:grpSpPr>
-        <a:xfrm>
-          <a:off x="0" y="0"/>
-          <a:ext cx="0" cy="0"/>
-          <a:chOff x="0" y="0"/>
-          <a:chExt cx="0" cy="0"/>
-        </a:xfrm>
-      </p:grpSpPr>
-      <p:sp>
-        <p:nvSpPr>
-          <p:cNvPr id="137" name="Google Shape;137;g2e840c0e919_0_357:notes">
-            <a:extLst>
-              <a:ext uri="{FF2B5EF4-FFF2-40B4-BE49-F238E27FC236}">
-                <a16:creationId xmlns:a16="http://schemas.microsoft.com/office/drawing/2014/main" id="{31ECDD7B-6148-CD75-BB28-F03200ED2F91}"/>
-              </a:ext>
-            </a:extLst>
-          </p:cNvPr>
-          <p:cNvSpPr>
-            <a:spLocks noGrp="1" noRot="1" noChangeAspect="1"/>
-          </p:cNvSpPr>
-          <p:nvPr>
-            <p:ph type="sldImg" idx="2"/>
-          </p:nvPr>
-        </p:nvSpPr>
-        <p:spPr>
-          <a:xfrm>
-            <a:off x="381000" y="685800"/>
-            <a:ext cx="6096000" cy="3429000"/>
-          </a:xfrm>
-          <a:custGeom>
-            <a:avLst/>
-            <a:gdLst/>
-            <a:ahLst/>
-            <a:cxnLst/>
-            <a:rect l="l" t="t" r="r" b="b"/>
-            <a:pathLst>
-              <a:path w="120000" h="120000" extrusionOk="0">
-                <a:moveTo>
-                  <a:pt x="0" y="0"/>
-                </a:moveTo>
-                <a:lnTo>
-                  <a:pt x="120000" y="0"/>
-                </a:lnTo>
-                <a:lnTo>
-                  <a:pt x="120000" y="120000"/>
-                </a:lnTo>
-                <a:lnTo>
-                  <a:pt x="0" y="120000"/>
-                </a:lnTo>
-                <a:close/>
-              </a:path>
-            </a:pathLst>
-          </a:custGeom>
-        </p:spPr>
-      </p:sp>
-      <p:sp>
-        <p:nvSpPr>
-          <p:cNvPr id="138" name="Google Shape;138;g2e840c0e919_0_357:notes">
-            <a:extLst>
-              <a:ext uri="{FF2B5EF4-FFF2-40B4-BE49-F238E27FC236}">
-                <a16:creationId xmlns:a16="http://schemas.microsoft.com/office/drawing/2014/main" id="{37FA97CA-D99C-9271-D605-2AAF37179E96}"/>
-              </a:ext>
-            </a:extLst>
-          </p:cNvPr>
-          <p:cNvSpPr txBox="1">
-            <a:spLocks noGrp="1"/>
-          </p:cNvSpPr>
-          <p:nvPr>
-            <p:ph type="body" idx="1"/>
-          </p:nvPr>
-        </p:nvSpPr>
-        <p:spPr>
-          <a:xfrm>
-            <a:off x="685800" y="4343400"/>
-            <a:ext cx="5486400" cy="4114800"/>
-          </a:xfrm>
-          <a:prstGeom prst="rect">
-            <a:avLst/>
-          </a:prstGeom>
-        </p:spPr>
-        <p:txBody>
-          <a:bodyPr spcFirstLastPara="1" wrap="square" lIns="91425" tIns="91425" rIns="91425" bIns="91425" anchor="t" anchorCtr="0">
-            <a:noAutofit/>
-          </a:bodyPr>
-          <a:lstStyle/>
-          <a:p>
-            <a:pPr marL="0" lvl="0" indent="0" algn="just" rtl="0">
-              <a:lnSpc>
-                <a:spcPct val="115000"/>
-              </a:lnSpc>
-              <a:spcBef>
-                <a:spcPts val="0"/>
-              </a:spcBef>
-              <a:spcAft>
-                <a:spcPts val="0"/>
-              </a:spcAft>
-              <a:buClr>
-                <a:schemeClr val="dk1"/>
-              </a:buClr>
-              <a:buSzPts val="1100"/>
-              <a:buFont typeface="Arial"/>
-              <a:buNone/>
-            </a:pPr>
-            <a:endParaRPr dirty="0"/>
-          </a:p>
-        </p:txBody>
-      </p:sp>
-    </p:spTree>
-    <p:extLst>
-      <p:ext uri="{BB962C8B-B14F-4D97-AF65-F5344CB8AC3E}">
-        <p14:creationId xmlns:p14="http://schemas.microsoft.com/office/powerpoint/2010/main" val="3091672263"/>
       </p:ext>
     </p:extLst>
   </p:cSld>
@@ -8497,7 +8791,7 @@
                   <a:srgbClr val="124484"/>
                 </a:solidFill>
               </a:rPr>
-              <a:t>Motivación</a:t>
+              <a:t>Motivation: best-performing program</a:t>
             </a:r>
             <a:endParaRPr dirty="0">
               <a:solidFill>
@@ -8541,7 +8835,7 @@
         </p:nvSpPr>
         <p:spPr>
           <a:xfrm>
-            <a:off x="1508250" y="827575"/>
+            <a:off x="1874009" y="1140237"/>
             <a:ext cx="1023900" cy="427500"/>
           </a:xfrm>
           <a:prstGeom prst="rect">
@@ -8571,12 +8865,20 @@
               <a:buNone/>
             </a:pPr>
             <a:r>
+              <a:rPr lang="ca-ES" sz="1600" b="1" dirty="0">
+                <a:solidFill>
+                  <a:srgbClr val="0070C0"/>
+                </a:solidFill>
+              </a:rPr>
+              <a:t>S</a:t>
+            </a:r>
+            <a:r>
               <a:rPr lang="es" sz="1600" b="1" dirty="0">
                 <a:solidFill>
                   <a:srgbClr val="0070C0"/>
                 </a:solidFill>
               </a:rPr>
-              <a:t>smart</a:t>
+              <a:t>mart </a:t>
             </a:r>
             <a:endParaRPr sz="1600" b="1" dirty="0">
               <a:solidFill>
@@ -8594,7 +8896,7 @@
         </p:nvSpPr>
         <p:spPr>
           <a:xfrm>
-            <a:off x="3326650" y="827575"/>
+            <a:off x="3692409" y="1140237"/>
             <a:ext cx="923100" cy="427500"/>
           </a:xfrm>
           <a:prstGeom prst="rect">
@@ -8647,7 +8949,7 @@
         </p:nvSpPr>
         <p:spPr>
           <a:xfrm>
-            <a:off x="4925750" y="828765"/>
+            <a:off x="5291509" y="1141427"/>
             <a:ext cx="1269900" cy="427500"/>
           </a:xfrm>
           <a:prstGeom prst="rect">
@@ -8700,7 +9002,7 @@
         </p:nvSpPr>
         <p:spPr>
           <a:xfrm>
-            <a:off x="1124475" y="1322638"/>
+            <a:off x="1490234" y="1635300"/>
             <a:ext cx="1773000" cy="427500"/>
           </a:xfrm>
           <a:prstGeom prst="rect">
@@ -8753,7 +9055,7 @@
         </p:nvSpPr>
         <p:spPr>
           <a:xfrm>
-            <a:off x="2921325" y="1301599"/>
+            <a:off x="3287084" y="1614261"/>
             <a:ext cx="1773000" cy="427500"/>
           </a:xfrm>
           <a:prstGeom prst="rect">
@@ -8806,7 +9108,7 @@
         </p:nvSpPr>
         <p:spPr>
           <a:xfrm>
-            <a:off x="4977884" y="1350957"/>
+            <a:off x="5343643" y="1663619"/>
             <a:ext cx="1291866" cy="427500"/>
           </a:xfrm>
           <a:prstGeom prst="rect">
@@ -8859,7 +9161,7 @@
         </p:nvSpPr>
         <p:spPr>
           <a:xfrm>
-            <a:off x="1083300" y="1939625"/>
+            <a:off x="1449059" y="2252287"/>
             <a:ext cx="1773000" cy="427500"/>
           </a:xfrm>
           <a:prstGeom prst="rect">
@@ -8920,7 +9222,7 @@
         </p:nvSpPr>
         <p:spPr>
           <a:xfrm>
-            <a:off x="2935550" y="1916835"/>
+            <a:off x="3301309" y="2229497"/>
             <a:ext cx="1773000" cy="427500"/>
           </a:xfrm>
           <a:prstGeom prst="rect">
@@ -8981,7 +9283,7 @@
         </p:nvSpPr>
         <p:spPr>
           <a:xfrm>
-            <a:off x="4737317" y="1948541"/>
+            <a:off x="5103076" y="2261203"/>
             <a:ext cx="1773000" cy="427500"/>
           </a:xfrm>
           <a:prstGeom prst="rect">
@@ -9034,7 +9336,7 @@
         </p:nvCxnSpPr>
         <p:spPr>
           <a:xfrm flipH="1">
-            <a:off x="2889775" y="921750"/>
+            <a:off x="3255534" y="1234412"/>
             <a:ext cx="12300" cy="1650000"/>
           </a:xfrm>
           <a:prstGeom prst="straightConnector1">
@@ -9060,7 +9362,7 @@
         </p:nvCxnSpPr>
         <p:spPr>
           <a:xfrm flipH="1">
-            <a:off x="4756250" y="921750"/>
+            <a:off x="5122009" y="1234412"/>
             <a:ext cx="12300" cy="1650000"/>
           </a:xfrm>
           <a:prstGeom prst="straightConnector1">
@@ -9088,7 +9390,7 @@
         </p:nvCxnSpPr>
         <p:spPr>
           <a:xfrm flipH="1" flipV="1">
-            <a:off x="1006050" y="1254875"/>
+            <a:off x="1371809" y="1567537"/>
             <a:ext cx="7054650" cy="7425"/>
           </a:xfrm>
           <a:prstGeom prst="straightConnector1">
@@ -9116,7 +9418,7 @@
         </p:nvCxnSpPr>
         <p:spPr>
           <a:xfrm flipH="1" flipV="1">
-            <a:off x="989500" y="1814538"/>
+            <a:off x="1355259" y="2127200"/>
             <a:ext cx="7071200" cy="28761"/>
           </a:xfrm>
           <a:prstGeom prst="straightConnector1">
@@ -9142,7 +9444,7 @@
         </p:nvSpPr>
         <p:spPr>
           <a:xfrm>
-            <a:off x="333183" y="2732920"/>
+            <a:off x="3501136" y="3194059"/>
             <a:ext cx="4397934" cy="603478"/>
           </a:xfrm>
           <a:prstGeom prst="rect">
@@ -9266,7 +9568,7 @@
         </p:nvSpPr>
         <p:spPr>
           <a:xfrm>
-            <a:off x="126725" y="798812"/>
+            <a:off x="492484" y="1111474"/>
             <a:ext cx="1023900" cy="427500"/>
           </a:xfrm>
           <a:prstGeom prst="rect">
@@ -9333,7 +9635,7 @@
         </p:nvSpPr>
         <p:spPr>
           <a:xfrm>
-            <a:off x="49775" y="1298381"/>
+            <a:off x="415534" y="1611043"/>
             <a:ext cx="1023900" cy="427500"/>
           </a:xfrm>
           <a:prstGeom prst="rect">
@@ -9392,7 +9694,7 @@
         </p:nvSpPr>
         <p:spPr>
           <a:xfrm>
-            <a:off x="60543" y="1894149"/>
+            <a:off x="426302" y="2206811"/>
             <a:ext cx="1196363" cy="427500"/>
           </a:xfrm>
           <a:prstGeom prst="rect">
@@ -9451,7 +9753,7 @@
         </p:nvCxnSpPr>
         <p:spPr>
           <a:xfrm flipH="1">
-            <a:off x="6510317" y="921750"/>
+            <a:off x="6876076" y="1234412"/>
             <a:ext cx="12300" cy="1650000"/>
           </a:xfrm>
           <a:prstGeom prst="straightConnector1">
@@ -9483,7 +9785,7 @@
         </p:nvSpPr>
         <p:spPr>
           <a:xfrm>
-            <a:off x="6694891" y="809275"/>
+            <a:off x="7060650" y="1121937"/>
             <a:ext cx="1269900" cy="427500"/>
           </a:xfrm>
           <a:prstGeom prst="rect">
@@ -9542,7 +9844,7 @@
         </p:nvSpPr>
         <p:spPr>
           <a:xfrm>
-            <a:off x="6367882" y="1955925"/>
+            <a:off x="6733641" y="2268587"/>
             <a:ext cx="1773000" cy="427500"/>
           </a:xfrm>
           <a:prstGeom prst="rect">
@@ -9601,7 +9903,7 @@
         </p:nvSpPr>
         <p:spPr>
           <a:xfrm>
-            <a:off x="6443341" y="1330725"/>
+            <a:off x="6809100" y="1643387"/>
             <a:ext cx="1773000" cy="427500"/>
           </a:xfrm>
           <a:prstGeom prst="rect">
@@ -9668,7 +9970,7 @@
         </p:nvSpPr>
         <p:spPr>
           <a:xfrm>
-            <a:off x="5302766" y="3734736"/>
+            <a:off x="4615509" y="4002073"/>
             <a:ext cx="2757933" cy="584775"/>
           </a:xfrm>
           <a:prstGeom prst="rect">
@@ -9936,6 +10238,164 @@
           </p:txBody>
         </p:sp>
       </p:grpSp>
+      <p:sp>
+        <p:nvSpPr>
+          <p:cNvPr id="5" name="Google Shape;469;p31">
+            <a:extLst>
+              <a:ext uri="{FF2B5EF4-FFF2-40B4-BE49-F238E27FC236}">
+                <a16:creationId xmlns:a16="http://schemas.microsoft.com/office/drawing/2014/main" id="{3B926F55-B11C-2939-FA90-58951132A6F6}"/>
+              </a:ext>
+            </a:extLst>
+          </p:cNvPr>
+          <p:cNvSpPr txBox="1"/>
+          <p:nvPr/>
+        </p:nvSpPr>
+        <p:spPr>
+          <a:xfrm>
+            <a:off x="1247579" y="714968"/>
+            <a:ext cx="2444829" cy="427500"/>
+          </a:xfrm>
+          <a:prstGeom prst="rect">
+            <a:avLst/>
+          </a:prstGeom>
+          <a:noFill/>
+          <a:ln>
+            <a:noFill/>
+          </a:ln>
+        </p:spPr>
+        <p:txBody>
+          <a:bodyPr spcFirstLastPara="1" wrap="square" lIns="91425" tIns="91425" rIns="91425" bIns="91425" anchor="ctr" anchorCtr="0">
+            <a:noAutofit/>
+          </a:bodyPr>
+          <a:lstStyle/>
+          <a:p>
+            <a:pPr marL="0" lvl="0" indent="0" algn="ctr" rtl="0">
+              <a:lnSpc>
+                <a:spcPct val="100000"/>
+              </a:lnSpc>
+              <a:spcBef>
+                <a:spcPts val="0"/>
+              </a:spcBef>
+              <a:spcAft>
+                <a:spcPts val="0"/>
+              </a:spcAft>
+              <a:buNone/>
+            </a:pPr>
+            <a:r>
+              <a:rPr lang="ca-ES" sz="1600" b="1" dirty="0" err="1">
+                <a:solidFill>
+                  <a:srgbClr val="C00000"/>
+                </a:solidFill>
+              </a:rPr>
+              <a:t>Algorithmic</a:t>
+            </a:r>
+            <a:r>
+              <a:rPr lang="ca-ES" sz="1600" b="1" dirty="0">
+                <a:solidFill>
+                  <a:srgbClr val="C00000"/>
+                </a:solidFill>
+              </a:rPr>
+              <a:t> </a:t>
+            </a:r>
+            <a:r>
+              <a:rPr lang="ca-ES" sz="1600" b="1" dirty="0" err="1">
+                <a:solidFill>
+                  <a:srgbClr val="C00000"/>
+                </a:solidFill>
+              </a:rPr>
+              <a:t>complexity</a:t>
+            </a:r>
+            <a:endParaRPr sz="1600" b="1" dirty="0">
+              <a:solidFill>
+                <a:srgbClr val="C00000"/>
+              </a:solidFill>
+            </a:endParaRPr>
+          </a:p>
+        </p:txBody>
+      </p:sp>
+      <p:sp>
+        <p:nvSpPr>
+          <p:cNvPr id="6" name="Google Shape;469;p31">
+            <a:extLst>
+              <a:ext uri="{FF2B5EF4-FFF2-40B4-BE49-F238E27FC236}">
+                <a16:creationId xmlns:a16="http://schemas.microsoft.com/office/drawing/2014/main" id="{E541B946-254C-FEA9-82BE-05436D9BB784}"/>
+              </a:ext>
+            </a:extLst>
+          </p:cNvPr>
+          <p:cNvSpPr txBox="1"/>
+          <p:nvPr/>
+        </p:nvSpPr>
+        <p:spPr>
+          <a:xfrm>
+            <a:off x="4255105" y="708041"/>
+            <a:ext cx="3440495" cy="427500"/>
+          </a:xfrm>
+          <a:prstGeom prst="rect">
+            <a:avLst/>
+          </a:prstGeom>
+          <a:noFill/>
+          <a:ln>
+            <a:noFill/>
+          </a:ln>
+        </p:spPr>
+        <p:txBody>
+          <a:bodyPr spcFirstLastPara="1" wrap="square" lIns="91425" tIns="91425" rIns="91425" bIns="91425" anchor="ctr" anchorCtr="0">
+            <a:noAutofit/>
+          </a:bodyPr>
+          <a:lstStyle/>
+          <a:p>
+            <a:pPr marL="0" lvl="0" indent="0" algn="ctr" rtl="0">
+              <a:lnSpc>
+                <a:spcPct val="100000"/>
+              </a:lnSpc>
+              <a:spcBef>
+                <a:spcPts val="0"/>
+              </a:spcBef>
+              <a:spcAft>
+                <a:spcPts val="0"/>
+              </a:spcAft>
+              <a:buNone/>
+            </a:pPr>
+            <a:r>
+              <a:rPr lang="ca-ES" sz="1600" b="1" dirty="0">
+                <a:solidFill>
+                  <a:srgbClr val="C00000"/>
+                </a:solidFill>
+              </a:rPr>
+              <a:t>Hardware-</a:t>
+            </a:r>
+            <a:r>
+              <a:rPr lang="ca-ES" sz="1600" b="1" dirty="0" err="1">
+                <a:solidFill>
+                  <a:srgbClr val="C00000"/>
+                </a:solidFill>
+              </a:rPr>
+              <a:t>based</a:t>
+            </a:r>
+            <a:r>
+              <a:rPr lang="ca-ES" sz="1600" b="1" dirty="0">
+                <a:solidFill>
+                  <a:srgbClr val="C00000"/>
+                </a:solidFill>
+              </a:rPr>
+              <a:t> </a:t>
+            </a:r>
+            <a:r>
+              <a:rPr lang="ca-ES" sz="1600" b="1" dirty="0" err="1">
+                <a:solidFill>
+                  <a:srgbClr val="C00000"/>
+                </a:solidFill>
+              </a:rPr>
+              <a:t>requirements</a:t>
+            </a:r>
+            <a:endParaRPr sz="1600" b="1" dirty="0">
+              <a:solidFill>
+                <a:srgbClr val="C00000"/>
+              </a:solidFill>
+            </a:endParaRPr>
+          </a:p>
+        </p:txBody>
+      </p:sp>
     </p:spTree>
   </p:cSld>
   <p:clrMapOvr>
@@ -10769,6 +11229,96 @@
                       </p:childTnLst>
                     </p:cTn>
                   </p:par>
+                  <p:par>
+                    <p:cTn id="73" fill="hold">
+                      <p:stCondLst>
+                        <p:cond delay="indefinite"/>
+                      </p:stCondLst>
+                      <p:childTnLst>
+                        <p:par>
+                          <p:cTn id="74" fill="hold">
+                            <p:stCondLst>
+                              <p:cond delay="0"/>
+                            </p:stCondLst>
+                            <p:childTnLst>
+                              <p:par>
+                                <p:cTn id="75" presetID="1" presetClass="entr" presetSubtype="0" fill="hold" grpId="0" nodeType="clickEffect">
+                                  <p:stCondLst>
+                                    <p:cond delay="0"/>
+                                  </p:stCondLst>
+                                  <p:childTnLst>
+                                    <p:set>
+                                      <p:cBhvr>
+                                        <p:cTn id="76" dur="1" fill="hold">
+                                          <p:stCondLst>
+                                            <p:cond delay="0"/>
+                                          </p:stCondLst>
+                                        </p:cTn>
+                                        <p:tgtEl>
+                                          <p:spTgt spid="5"/>
+                                        </p:tgtEl>
+                                        <p:attrNameLst>
+                                          <p:attrName>style.visibility</p:attrName>
+                                        </p:attrNameLst>
+                                      </p:cBhvr>
+                                      <p:to>
+                                        <p:strVal val="visible"/>
+                                      </p:to>
+                                    </p:set>
+                                  </p:childTnLst>
+                                </p:cTn>
+                              </p:par>
+                            </p:childTnLst>
+                          </p:cTn>
+                        </p:par>
+                      </p:childTnLst>
+                    </p:cTn>
+                  </p:par>
+                  <p:par>
+                    <p:cTn id="77" fill="hold">
+                      <p:stCondLst>
+                        <p:cond delay="indefinite"/>
+                      </p:stCondLst>
+                      <p:childTnLst>
+                        <p:par>
+                          <p:cTn id="78" fill="hold">
+                            <p:stCondLst>
+                              <p:cond delay="0"/>
+                            </p:stCondLst>
+                            <p:childTnLst>
+                              <p:par>
+                                <p:cTn id="79" presetID="1" presetClass="entr" presetSubtype="0" fill="hold" grpId="0" nodeType="clickEffect">
+                                  <p:stCondLst>
+                                    <p:cond delay="0"/>
+                                  </p:stCondLst>
+                                  <p:childTnLst>
+                                    <p:set>
+                                      <p:cBhvr>
+                                        <p:cTn id="80" dur="1" fill="hold">
+                                          <p:stCondLst>
+                                            <p:cond delay="0"/>
+                                          </p:stCondLst>
+                                        </p:cTn>
+                                        <p:tgtEl>
+                                          <p:spTgt spid="6"/>
+                                        </p:tgtEl>
+                                        <p:attrNameLst>
+                                          <p:attrName>style.visibility</p:attrName>
+                                        </p:attrNameLst>
+                                      </p:cBhvr>
+                                      <p:to>
+                                        <p:strVal val="visible"/>
+                                      </p:to>
+                                    </p:set>
+                                  </p:childTnLst>
+                                </p:cTn>
+                              </p:par>
+                            </p:childTnLst>
+                          </p:cTn>
+                        </p:par>
+                      </p:childTnLst>
+                    </p:cTn>
+                  </p:par>
                 </p:childTnLst>
               </p:cTn>
               <p:prevCondLst>
@@ -10807,6 +11357,936 @@
       <p:bldP spid="11" grpId="0"/>
       <p:bldP spid="12" grpId="0"/>
       <p:bldP spid="14" grpId="0"/>
+      <p:bldP spid="5" grpId="0"/>
+      <p:bldP spid="6" grpId="0"/>
+    </p:bldLst>
+  </p:timing>
+</p:sld>
+</file>
+
+<file path=ppt/slides/slide10.xml><?xml version="1.0" encoding="utf-8"?>
+<p:sld xmlns:a="http://schemas.openxmlformats.org/drawingml/2006/main" xmlns:r="http://schemas.openxmlformats.org/officeDocument/2006/relationships" xmlns:p="http://schemas.openxmlformats.org/presentationml/2006/main">
+  <p:cSld>
+    <p:spTree>
+      <p:nvGrpSpPr>
+        <p:cNvPr id="1" name="Shape 139">
+          <a:extLst>
+            <a:ext uri="{FF2B5EF4-FFF2-40B4-BE49-F238E27FC236}">
+              <a16:creationId xmlns:a16="http://schemas.microsoft.com/office/drawing/2014/main" id="{FD40D2B8-F17C-9475-662B-68F78CC3C431}"/>
+            </a:ext>
+          </a:extLst>
+        </p:cNvPr>
+        <p:cNvGrpSpPr/>
+        <p:nvPr/>
+      </p:nvGrpSpPr>
+      <p:grpSpPr>
+        <a:xfrm>
+          <a:off x="0" y="0"/>
+          <a:ext cx="0" cy="0"/>
+          <a:chOff x="0" y="0"/>
+          <a:chExt cx="0" cy="0"/>
+        </a:xfrm>
+      </p:grpSpPr>
+      <p:pic>
+        <p:nvPicPr>
+          <p:cNvPr id="4" name="Imatge 3">
+            <a:extLst>
+              <a:ext uri="{FF2B5EF4-FFF2-40B4-BE49-F238E27FC236}">
+                <a16:creationId xmlns:a16="http://schemas.microsoft.com/office/drawing/2014/main" id="{5ED3E121-8BD3-E80C-B07B-68D478B6AD4A}"/>
+              </a:ext>
+            </a:extLst>
+          </p:cNvPr>
+          <p:cNvPicPr>
+            <a:picLocks noChangeAspect="1"/>
+          </p:cNvPicPr>
+          <p:nvPr/>
+        </p:nvPicPr>
+        <p:blipFill>
+          <a:blip r:embed="rId3"/>
+          <a:srcRect t="8631"/>
+          <a:stretch>
+            <a:fillRect/>
+          </a:stretch>
+        </p:blipFill>
+        <p:spPr>
+          <a:xfrm>
+            <a:off x="71162" y="291548"/>
+            <a:ext cx="9039708" cy="4792317"/>
+          </a:xfrm>
+          <a:prstGeom prst="rect">
+            <a:avLst/>
+          </a:prstGeom>
+        </p:spPr>
+      </p:pic>
+    </p:spTree>
+    <p:extLst>
+      <p:ext uri="{BB962C8B-B14F-4D97-AF65-F5344CB8AC3E}">
+        <p14:creationId xmlns:p14="http://schemas.microsoft.com/office/powerpoint/2010/main" val="251131961"/>
+      </p:ext>
+    </p:extLst>
+  </p:cSld>
+  <p:clrMapOvr>
+    <a:masterClrMapping/>
+  </p:clrMapOvr>
+</p:sld>
+</file>
+
+<file path=ppt/slides/slide11.xml><?xml version="1.0" encoding="utf-8"?>
+<p:sld xmlns:a="http://schemas.openxmlformats.org/drawingml/2006/main" xmlns:r="http://schemas.openxmlformats.org/officeDocument/2006/relationships" xmlns:p="http://schemas.openxmlformats.org/presentationml/2006/main">
+  <p:cSld>
+    <p:spTree>
+      <p:nvGrpSpPr>
+        <p:cNvPr id="1" name="Shape 139">
+          <a:extLst>
+            <a:ext uri="{FF2B5EF4-FFF2-40B4-BE49-F238E27FC236}">
+              <a16:creationId xmlns:a16="http://schemas.microsoft.com/office/drawing/2014/main" id="{91025BA9-F07A-D8A9-792A-AAA100F629F8}"/>
+            </a:ext>
+          </a:extLst>
+        </p:cNvPr>
+        <p:cNvGrpSpPr/>
+        <p:nvPr/>
+      </p:nvGrpSpPr>
+      <p:grpSpPr>
+        <a:xfrm>
+          <a:off x="0" y="0"/>
+          <a:ext cx="0" cy="0"/>
+          <a:chOff x="0" y="0"/>
+          <a:chExt cx="0" cy="0"/>
+        </a:xfrm>
+      </p:grpSpPr>
+      <p:sp>
+        <p:nvSpPr>
+          <p:cNvPr id="2" name="Rectangle 1">
+            <a:extLst>
+              <a:ext uri="{FF2B5EF4-FFF2-40B4-BE49-F238E27FC236}">
+                <a16:creationId xmlns:a16="http://schemas.microsoft.com/office/drawing/2014/main" id="{B1DD50D7-8E4E-C285-391A-13CFF06C5587}"/>
+              </a:ext>
+            </a:extLst>
+          </p:cNvPr>
+          <p:cNvSpPr/>
+          <p:nvPr/>
+        </p:nvSpPr>
+        <p:spPr>
+          <a:xfrm>
+            <a:off x="135732" y="4159044"/>
+            <a:ext cx="2075592" cy="902031"/>
+          </a:xfrm>
+          <a:prstGeom prst="rect">
+            <a:avLst/>
+          </a:prstGeom>
+          <a:solidFill>
+            <a:schemeClr val="accent1">
+              <a:lumMod val="20000"/>
+              <a:lumOff val="80000"/>
+            </a:schemeClr>
+          </a:solidFill>
+          <a:ln w="9525"/>
+        </p:spPr>
+        <p:style>
+          <a:lnRef idx="2">
+            <a:schemeClr val="accent1">
+              <a:shade val="15000"/>
+            </a:schemeClr>
+          </a:lnRef>
+          <a:fillRef idx="1">
+            <a:schemeClr val="accent1"/>
+          </a:fillRef>
+          <a:effectRef idx="0">
+            <a:schemeClr val="accent1"/>
+          </a:effectRef>
+          <a:fontRef idx="minor">
+            <a:schemeClr val="lt1"/>
+          </a:fontRef>
+        </p:style>
+        <p:txBody>
+          <a:bodyPr rtlCol="0" anchor="ctr"/>
+          <a:lstStyle/>
+          <a:p>
+            <a:pPr algn="ctr"/>
+            <a:endParaRPr lang="ca-ES" dirty="0"/>
+          </a:p>
+        </p:txBody>
+      </p:sp>
+      <p:pic>
+        <p:nvPicPr>
+          <p:cNvPr id="143" name="Google Shape;143;p23">
+            <a:extLst>
+              <a:ext uri="{FF2B5EF4-FFF2-40B4-BE49-F238E27FC236}">
+                <a16:creationId xmlns:a16="http://schemas.microsoft.com/office/drawing/2014/main" id="{63C28927-320A-5A8B-31FD-D3A5AE362416}"/>
+              </a:ext>
+            </a:extLst>
+          </p:cNvPr>
+          <p:cNvPicPr preferRelativeResize="0"/>
+          <p:nvPr/>
+        </p:nvPicPr>
+        <p:blipFill>
+          <a:blip r:embed="rId3">
+            <a:alphaModFix/>
+          </a:blip>
+          <a:stretch>
+            <a:fillRect/>
+          </a:stretch>
+        </p:blipFill>
+        <p:spPr>
+          <a:xfrm rot="18716787">
+            <a:off x="295019" y="333827"/>
+            <a:ext cx="761387" cy="774932"/>
+          </a:xfrm>
+          <a:prstGeom prst="rect">
+            <a:avLst/>
+          </a:prstGeom>
+          <a:noFill/>
+          <a:ln>
+            <a:noFill/>
+          </a:ln>
+        </p:spPr>
+      </p:pic>
+      <p:sp>
+        <p:nvSpPr>
+          <p:cNvPr id="10" name="Oval 9">
+            <a:extLst>
+              <a:ext uri="{FF2B5EF4-FFF2-40B4-BE49-F238E27FC236}">
+                <a16:creationId xmlns:a16="http://schemas.microsoft.com/office/drawing/2014/main" id="{B40DEC34-69B5-657E-0332-80525B7A8CC5}"/>
+              </a:ext>
+            </a:extLst>
+          </p:cNvPr>
+          <p:cNvSpPr/>
+          <p:nvPr/>
+        </p:nvSpPr>
+        <p:spPr>
+          <a:xfrm>
+            <a:off x="2211324" y="1805459"/>
+            <a:ext cx="45719" cy="45719"/>
+          </a:xfrm>
+          <a:prstGeom prst="ellipse">
+            <a:avLst/>
+          </a:prstGeom>
+          <a:solidFill>
+            <a:srgbClr val="FFFF00"/>
+          </a:solidFill>
+          <a:ln>
+            <a:solidFill>
+              <a:srgbClr val="FFFF00"/>
+            </a:solidFill>
+          </a:ln>
+        </p:spPr>
+        <p:style>
+          <a:lnRef idx="2">
+            <a:schemeClr val="accent1">
+              <a:shade val="15000"/>
+            </a:schemeClr>
+          </a:lnRef>
+          <a:fillRef idx="1">
+            <a:schemeClr val="accent1"/>
+          </a:fillRef>
+          <a:effectRef idx="0">
+            <a:schemeClr val="accent1"/>
+          </a:effectRef>
+          <a:fontRef idx="minor">
+            <a:schemeClr val="lt1"/>
+          </a:fontRef>
+        </p:style>
+        <p:txBody>
+          <a:bodyPr rtlCol="0" anchor="ctr"/>
+          <a:lstStyle/>
+          <a:p>
+            <a:pPr algn="ctr"/>
+            <a:endParaRPr lang="en-US" noProof="0" dirty="0"/>
+          </a:p>
+        </p:txBody>
+      </p:sp>
+      <p:sp>
+        <p:nvSpPr>
+          <p:cNvPr id="11" name="Google Shape;499;p31">
+            <a:extLst>
+              <a:ext uri="{FF2B5EF4-FFF2-40B4-BE49-F238E27FC236}">
+                <a16:creationId xmlns:a16="http://schemas.microsoft.com/office/drawing/2014/main" id="{99787ADD-5962-C72D-D541-314F6FE5AE1E}"/>
+              </a:ext>
+            </a:extLst>
+          </p:cNvPr>
+          <p:cNvSpPr/>
+          <p:nvPr/>
+        </p:nvSpPr>
+        <p:spPr>
+          <a:xfrm>
+            <a:off x="2665257" y="463128"/>
+            <a:ext cx="5615134" cy="516330"/>
+          </a:xfrm>
+          <a:prstGeom prst="rect">
+            <a:avLst/>
+          </a:prstGeom>
+          <a:noFill/>
+          <a:ln w="9525" cap="flat" cmpd="sng">
+            <a:noFill/>
+            <a:prstDash val="solid"/>
+            <a:round/>
+            <a:headEnd type="none" w="sm" len="sm"/>
+            <a:tailEnd type="none" w="sm" len="sm"/>
+          </a:ln>
+        </p:spPr>
+        <p:txBody>
+          <a:bodyPr spcFirstLastPara="1" wrap="square" lIns="91425" tIns="91425" rIns="91425" bIns="91425" anchor="ctr" anchorCtr="0">
+            <a:noAutofit/>
+          </a:bodyPr>
+          <a:lstStyle/>
+          <a:p>
+            <a:pPr marL="0" lvl="0" indent="0" algn="ctr" rtl="0">
+              <a:spcBef>
+                <a:spcPts val="0"/>
+              </a:spcBef>
+              <a:spcAft>
+                <a:spcPts val="0"/>
+              </a:spcAft>
+              <a:buNone/>
+            </a:pPr>
+            <a:r>
+              <a:rPr lang="en-US" sz="2000" b="1" noProof="0" dirty="0">
+                <a:solidFill>
+                  <a:srgbClr val="C00000"/>
+                </a:solidFill>
+              </a:rPr>
+              <a:t>Data Structures</a:t>
+            </a:r>
+            <a:r>
+              <a:rPr lang="en-US" sz="2000" noProof="0" dirty="0">
+                <a:solidFill>
+                  <a:srgbClr val="C00000"/>
+                </a:solidFill>
+              </a:rPr>
+              <a:t>: hold tile frontiers</a:t>
+            </a:r>
+            <a:endParaRPr lang="en-US" sz="2000" b="1" noProof="0" dirty="0">
+              <a:solidFill>
+                <a:srgbClr val="C00000"/>
+              </a:solidFill>
+            </a:endParaRPr>
+          </a:p>
+        </p:txBody>
+      </p:sp>
+      <p:sp>
+        <p:nvSpPr>
+          <p:cNvPr id="12" name="Google Shape;499;p31">
+            <a:extLst>
+              <a:ext uri="{FF2B5EF4-FFF2-40B4-BE49-F238E27FC236}">
+                <a16:creationId xmlns:a16="http://schemas.microsoft.com/office/drawing/2014/main" id="{70AB786E-9FF6-1127-CC92-1CCAC9B34583}"/>
+              </a:ext>
+            </a:extLst>
+          </p:cNvPr>
+          <p:cNvSpPr/>
+          <p:nvPr/>
+        </p:nvSpPr>
+        <p:spPr>
+          <a:xfrm>
+            <a:off x="3172600" y="1052886"/>
+            <a:ext cx="5479972" cy="3627486"/>
+          </a:xfrm>
+          <a:prstGeom prst="rect">
+            <a:avLst/>
+          </a:prstGeom>
+          <a:noFill/>
+          <a:ln w="9525" cap="flat" cmpd="sng">
+            <a:noFill/>
+            <a:prstDash val="solid"/>
+            <a:round/>
+            <a:headEnd type="none" w="sm" len="sm"/>
+            <a:tailEnd type="none" w="sm" len="sm"/>
+          </a:ln>
+        </p:spPr>
+        <p:txBody>
+          <a:bodyPr spcFirstLastPara="1" wrap="square" lIns="91425" tIns="91425" rIns="91425" bIns="91425" anchor="ctr" anchorCtr="0">
+            <a:noAutofit/>
+          </a:bodyPr>
+          <a:lstStyle/>
+          <a:p>
+            <a:pPr marL="0" lvl="0" indent="0" rtl="0">
+              <a:spcBef>
+                <a:spcPts val="1200"/>
+              </a:spcBef>
+              <a:spcAft>
+                <a:spcPts val="0"/>
+              </a:spcAft>
+              <a:buNone/>
+            </a:pPr>
+            <a:r>
+              <a:rPr lang="en-US" sz="2000" b="1" noProof="0" dirty="0">
+                <a:solidFill>
+                  <a:srgbClr val="007E39"/>
+                </a:solidFill>
+              </a:rPr>
+              <a:t>1</a:t>
+            </a:r>
+            <a:r>
+              <a:rPr lang="en-US" sz="2000" noProof="0" dirty="0">
+                <a:solidFill>
+                  <a:srgbClr val="007E39"/>
+                </a:solidFill>
+              </a:rPr>
+              <a:t>: promote sequential accesses to frontier data, required for tile-computing</a:t>
+            </a:r>
+          </a:p>
+          <a:p>
+            <a:pPr marL="0" lvl="0" indent="0" rtl="0">
+              <a:spcBef>
+                <a:spcPts val="1200"/>
+              </a:spcBef>
+              <a:spcAft>
+                <a:spcPts val="0"/>
+              </a:spcAft>
+              <a:buNone/>
+            </a:pPr>
+            <a:r>
+              <a:rPr lang="en-US" sz="2000" b="1" dirty="0">
+                <a:solidFill>
+                  <a:srgbClr val="007E39"/>
+                </a:solidFill>
+              </a:rPr>
+              <a:t>2</a:t>
+            </a:r>
+            <a:r>
+              <a:rPr lang="en-US" sz="2000" dirty="0">
+                <a:solidFill>
+                  <a:srgbClr val="007E39"/>
+                </a:solidFill>
+              </a:rPr>
+              <a:t>: simplify look for most-promising tile on a super-antidiagonal, required for next-tile computation</a:t>
+            </a:r>
+          </a:p>
+          <a:p>
+            <a:pPr marL="0" lvl="0" indent="0" rtl="0">
+              <a:spcBef>
+                <a:spcPts val="1200"/>
+              </a:spcBef>
+              <a:spcAft>
+                <a:spcPts val="0"/>
+              </a:spcAft>
+              <a:buNone/>
+            </a:pPr>
+            <a:r>
+              <a:rPr lang="en-US" sz="2000" b="1" noProof="0" dirty="0">
+                <a:solidFill>
+                  <a:srgbClr val="007E39"/>
+                </a:solidFill>
+              </a:rPr>
+              <a:t>3</a:t>
+            </a:r>
+            <a:r>
+              <a:rPr lang="en-US" sz="2000" noProof="0" dirty="0">
+                <a:solidFill>
+                  <a:srgbClr val="007E39"/>
+                </a:solidFill>
+              </a:rPr>
+              <a:t>: temporal locality: prioritize data stored in fast memory </a:t>
+            </a:r>
+            <a:r>
+              <a:rPr lang="en-US" sz="2000" noProof="0" dirty="0">
+                <a:solidFill>
+                  <a:srgbClr val="007E39"/>
+                </a:solidFill>
+                <a:sym typeface="Wingdings" panose="05000000000000000000" pitchFamily="2" charset="2"/>
+              </a:rPr>
+              <a:t> (1) more likely to be used in the near future &amp; (2) more expensive to recompute in case it is not available</a:t>
+            </a:r>
+            <a:endParaRPr lang="en-US" sz="2000" noProof="0" dirty="0">
+              <a:solidFill>
+                <a:srgbClr val="007E39"/>
+              </a:solidFill>
+            </a:endParaRPr>
+          </a:p>
+        </p:txBody>
+      </p:sp>
+      <p:pic>
+        <p:nvPicPr>
+          <p:cNvPr id="13" name="Google Shape;143;p23">
+            <a:extLst>
+              <a:ext uri="{FF2B5EF4-FFF2-40B4-BE49-F238E27FC236}">
+                <a16:creationId xmlns:a16="http://schemas.microsoft.com/office/drawing/2014/main" id="{53F75A61-F76B-E3E9-E693-380BFBE5EBE3}"/>
+              </a:ext>
+            </a:extLst>
+          </p:cNvPr>
+          <p:cNvPicPr preferRelativeResize="0"/>
+          <p:nvPr/>
+        </p:nvPicPr>
+        <p:blipFill>
+          <a:blip r:embed="rId3">
+            <a:alphaModFix/>
+          </a:blip>
+          <a:stretch>
+            <a:fillRect/>
+          </a:stretch>
+        </p:blipFill>
+        <p:spPr>
+          <a:xfrm rot="18716787">
+            <a:off x="855947" y="847396"/>
+            <a:ext cx="761387" cy="774932"/>
+          </a:xfrm>
+          <a:prstGeom prst="rect">
+            <a:avLst/>
+          </a:prstGeom>
+          <a:noFill/>
+          <a:ln>
+            <a:noFill/>
+          </a:ln>
+        </p:spPr>
+      </p:pic>
+      <p:cxnSp>
+        <p:nvCxnSpPr>
+          <p:cNvPr id="4" name="Connector recte 3">
+            <a:extLst>
+              <a:ext uri="{FF2B5EF4-FFF2-40B4-BE49-F238E27FC236}">
+                <a16:creationId xmlns:a16="http://schemas.microsoft.com/office/drawing/2014/main" id="{B735C9A4-7A1E-FBC2-FBEC-BFA02D736242}"/>
+              </a:ext>
+            </a:extLst>
+          </p:cNvPr>
+          <p:cNvCxnSpPr/>
+          <p:nvPr/>
+        </p:nvCxnSpPr>
+        <p:spPr>
+          <a:xfrm>
+            <a:off x="1767498" y="1222145"/>
+            <a:ext cx="570160" cy="513569"/>
+          </a:xfrm>
+          <a:prstGeom prst="line">
+            <a:avLst/>
+          </a:prstGeom>
+          <a:ln w="38100"/>
+        </p:spPr>
+        <p:style>
+          <a:lnRef idx="1">
+            <a:schemeClr val="accent1"/>
+          </a:lnRef>
+          <a:fillRef idx="0">
+            <a:schemeClr val="accent1"/>
+          </a:fillRef>
+          <a:effectRef idx="0">
+            <a:schemeClr val="accent1"/>
+          </a:effectRef>
+          <a:fontRef idx="minor">
+            <a:schemeClr val="tx1"/>
+          </a:fontRef>
+        </p:style>
+      </p:cxnSp>
+      <p:cxnSp>
+        <p:nvCxnSpPr>
+          <p:cNvPr id="5" name="Connector recte 4">
+            <a:extLst>
+              <a:ext uri="{FF2B5EF4-FFF2-40B4-BE49-F238E27FC236}">
+                <a16:creationId xmlns:a16="http://schemas.microsoft.com/office/drawing/2014/main" id="{56BD3594-20BE-530D-DBB0-EE71B8BC0890}"/>
+              </a:ext>
+            </a:extLst>
+          </p:cNvPr>
+          <p:cNvCxnSpPr/>
+          <p:nvPr/>
+        </p:nvCxnSpPr>
+        <p:spPr>
+          <a:xfrm>
+            <a:off x="1293640" y="1766428"/>
+            <a:ext cx="570160" cy="513569"/>
+          </a:xfrm>
+          <a:prstGeom prst="line">
+            <a:avLst/>
+          </a:prstGeom>
+          <a:ln w="38100"/>
+        </p:spPr>
+        <p:style>
+          <a:lnRef idx="1">
+            <a:schemeClr val="accent1"/>
+          </a:lnRef>
+          <a:fillRef idx="0">
+            <a:schemeClr val="accent1"/>
+          </a:fillRef>
+          <a:effectRef idx="0">
+            <a:schemeClr val="accent1"/>
+          </a:effectRef>
+          <a:fontRef idx="minor">
+            <a:schemeClr val="tx1"/>
+          </a:fontRef>
+        </p:style>
+      </p:cxnSp>
+      <p:cxnSp>
+        <p:nvCxnSpPr>
+          <p:cNvPr id="6" name="Connector recte 5">
+            <a:extLst>
+              <a:ext uri="{FF2B5EF4-FFF2-40B4-BE49-F238E27FC236}">
+                <a16:creationId xmlns:a16="http://schemas.microsoft.com/office/drawing/2014/main" id="{4D4FFB01-1A91-BD22-718E-FE19AEA28893}"/>
+              </a:ext>
+            </a:extLst>
+          </p:cNvPr>
+          <p:cNvCxnSpPr>
+            <a:cxnSpLocks/>
+          </p:cNvCxnSpPr>
+          <p:nvPr/>
+        </p:nvCxnSpPr>
+        <p:spPr>
+          <a:xfrm flipH="1">
+            <a:off x="1863800" y="1731116"/>
+            <a:ext cx="473858" cy="548881"/>
+          </a:xfrm>
+          <a:prstGeom prst="line">
+            <a:avLst/>
+          </a:prstGeom>
+          <a:ln w="38100">
+            <a:solidFill>
+              <a:srgbClr val="7030A0"/>
+            </a:solidFill>
+          </a:ln>
+        </p:spPr>
+        <p:style>
+          <a:lnRef idx="1">
+            <a:schemeClr val="accent1"/>
+          </a:lnRef>
+          <a:fillRef idx="0">
+            <a:schemeClr val="accent1"/>
+          </a:fillRef>
+          <a:effectRef idx="0">
+            <a:schemeClr val="accent1"/>
+          </a:effectRef>
+          <a:fontRef idx="minor">
+            <a:schemeClr val="tx1"/>
+          </a:fontRef>
+        </p:style>
+      </p:cxnSp>
+      <p:sp>
+        <p:nvSpPr>
+          <p:cNvPr id="8" name="Crida: línia corbada 7">
+            <a:extLst>
+              <a:ext uri="{FF2B5EF4-FFF2-40B4-BE49-F238E27FC236}">
+                <a16:creationId xmlns:a16="http://schemas.microsoft.com/office/drawing/2014/main" id="{1B92D2AE-3771-2D03-E6D2-5E96B727A188}"/>
+              </a:ext>
+            </a:extLst>
+          </p:cNvPr>
+          <p:cNvSpPr/>
+          <p:nvPr/>
+        </p:nvSpPr>
+        <p:spPr>
+          <a:xfrm>
+            <a:off x="2433177" y="781940"/>
+            <a:ext cx="739423" cy="516330"/>
+          </a:xfrm>
+          <a:prstGeom prst="borderCallout2">
+            <a:avLst>
+              <a:gd name="adj1" fmla="val 18750"/>
+              <a:gd name="adj2" fmla="val -8333"/>
+              <a:gd name="adj3" fmla="val 59882"/>
+              <a:gd name="adj4" fmla="val -46187"/>
+              <a:gd name="adj5" fmla="val 112500"/>
+              <a:gd name="adj6" fmla="val -46667"/>
+            </a:avLst>
+          </a:prstGeom>
+          <a:solidFill>
+            <a:schemeClr val="accent1">
+              <a:lumMod val="20000"/>
+              <a:lumOff val="80000"/>
+            </a:schemeClr>
+          </a:solidFill>
+          <a:ln w="12700">
+            <a:headEnd type="none" w="med" len="med"/>
+            <a:tailEnd type="triangle" w="med" len="med"/>
+          </a:ln>
+        </p:spPr>
+        <p:style>
+          <a:lnRef idx="2">
+            <a:schemeClr val="accent1">
+              <a:shade val="15000"/>
+            </a:schemeClr>
+          </a:lnRef>
+          <a:fillRef idx="1">
+            <a:schemeClr val="accent1"/>
+          </a:fillRef>
+          <a:effectRef idx="0">
+            <a:schemeClr val="accent1"/>
+          </a:effectRef>
+          <a:fontRef idx="minor">
+            <a:schemeClr val="lt1"/>
+          </a:fontRef>
+        </p:style>
+        <p:txBody>
+          <a:bodyPr rtlCol="0" anchor="ctr"/>
+          <a:lstStyle/>
+          <a:p>
+            <a:pPr algn="ctr"/>
+            <a:r>
+              <a:rPr lang="en-US" noProof="0" dirty="0">
+                <a:solidFill>
+                  <a:srgbClr val="002060"/>
+                </a:solidFill>
+              </a:rPr>
+              <a:t>right frontier</a:t>
+            </a:r>
+          </a:p>
+        </p:txBody>
+      </p:sp>
+      <p:sp>
+        <p:nvSpPr>
+          <p:cNvPr id="15" name="Crida: línia corbada 14">
+            <a:extLst>
+              <a:ext uri="{FF2B5EF4-FFF2-40B4-BE49-F238E27FC236}">
+                <a16:creationId xmlns:a16="http://schemas.microsoft.com/office/drawing/2014/main" id="{B7A87151-F8DE-0E0C-21FD-E7C6B0DE4695}"/>
+              </a:ext>
+            </a:extLst>
+          </p:cNvPr>
+          <p:cNvSpPr/>
+          <p:nvPr/>
+        </p:nvSpPr>
+        <p:spPr>
+          <a:xfrm>
+            <a:off x="624101" y="2196291"/>
+            <a:ext cx="739423" cy="516330"/>
+          </a:xfrm>
+          <a:prstGeom prst="borderCallout2">
+            <a:avLst>
+              <a:gd name="adj1" fmla="val -10956"/>
+              <a:gd name="adj2" fmla="val 60281"/>
+              <a:gd name="adj3" fmla="val -42948"/>
+              <a:gd name="adj4" fmla="val 74286"/>
+              <a:gd name="adj5" fmla="val -41745"/>
+              <a:gd name="adj6" fmla="val 107315"/>
+            </a:avLst>
+          </a:prstGeom>
+          <a:solidFill>
+            <a:schemeClr val="accent1">
+              <a:lumMod val="20000"/>
+              <a:lumOff val="80000"/>
+            </a:schemeClr>
+          </a:solidFill>
+          <a:ln w="12700">
+            <a:headEnd type="none" w="med" len="med"/>
+            <a:tailEnd type="triangle" w="med" len="med"/>
+          </a:ln>
+        </p:spPr>
+        <p:style>
+          <a:lnRef idx="2">
+            <a:schemeClr val="accent1">
+              <a:shade val="15000"/>
+            </a:schemeClr>
+          </a:lnRef>
+          <a:fillRef idx="1">
+            <a:schemeClr val="accent1"/>
+          </a:fillRef>
+          <a:effectRef idx="0">
+            <a:schemeClr val="accent1"/>
+          </a:effectRef>
+          <a:fontRef idx="minor">
+            <a:schemeClr val="lt1"/>
+          </a:fontRef>
+        </p:style>
+        <p:txBody>
+          <a:bodyPr rtlCol="0" anchor="ctr"/>
+          <a:lstStyle/>
+          <a:p>
+            <a:pPr algn="ctr"/>
+            <a:r>
+              <a:rPr lang="en-US" noProof="0" dirty="0">
+                <a:solidFill>
+                  <a:srgbClr val="002060"/>
+                </a:solidFill>
+              </a:rPr>
+              <a:t>left frontier</a:t>
+            </a:r>
+          </a:p>
+        </p:txBody>
+      </p:sp>
+      <p:sp>
+        <p:nvSpPr>
+          <p:cNvPr id="16" name="Crida: línia corbada 15">
+            <a:extLst>
+              <a:ext uri="{FF2B5EF4-FFF2-40B4-BE49-F238E27FC236}">
+                <a16:creationId xmlns:a16="http://schemas.microsoft.com/office/drawing/2014/main" id="{FC4F1520-D436-1544-26E6-386B09CB83C8}"/>
+              </a:ext>
+            </a:extLst>
+          </p:cNvPr>
+          <p:cNvSpPr/>
+          <p:nvPr/>
+        </p:nvSpPr>
+        <p:spPr>
+          <a:xfrm>
+            <a:off x="2063465" y="2279997"/>
+            <a:ext cx="739423" cy="291753"/>
+          </a:xfrm>
+          <a:prstGeom prst="borderCallout2">
+            <a:avLst>
+              <a:gd name="adj1" fmla="val -10956"/>
+              <a:gd name="adj2" fmla="val 60281"/>
+              <a:gd name="adj3" fmla="val -67212"/>
+              <a:gd name="adj4" fmla="val 55936"/>
+              <a:gd name="adj5" fmla="val -114538"/>
+              <a:gd name="adj6" fmla="val 25936"/>
+            </a:avLst>
+          </a:prstGeom>
+          <a:solidFill>
+            <a:srgbClr val="ECDFF5"/>
+          </a:solidFill>
+          <a:ln w="12700">
+            <a:solidFill>
+              <a:srgbClr val="7030A0"/>
+            </a:solidFill>
+            <a:headEnd type="none" w="med" len="med"/>
+            <a:tailEnd type="triangle" w="med" len="med"/>
+          </a:ln>
+        </p:spPr>
+        <p:style>
+          <a:lnRef idx="2">
+            <a:schemeClr val="accent1">
+              <a:shade val="15000"/>
+            </a:schemeClr>
+          </a:lnRef>
+          <a:fillRef idx="1">
+            <a:schemeClr val="accent1"/>
+          </a:fillRef>
+          <a:effectRef idx="0">
+            <a:schemeClr val="accent1"/>
+          </a:effectRef>
+          <a:fontRef idx="minor">
+            <a:schemeClr val="lt1"/>
+          </a:fontRef>
+        </p:style>
+        <p:txBody>
+          <a:bodyPr rtlCol="0" anchor="ctr"/>
+          <a:lstStyle/>
+          <a:p>
+            <a:pPr algn="ctr"/>
+            <a:r>
+              <a:rPr lang="en-US" noProof="0" dirty="0">
+                <a:solidFill>
+                  <a:srgbClr val="7030A0"/>
+                </a:solidFill>
+              </a:rPr>
+              <a:t>front</a:t>
+            </a:r>
+          </a:p>
+        </p:txBody>
+      </p:sp>
+    </p:spTree>
+    <p:extLst>
+      <p:ext uri="{BB962C8B-B14F-4D97-AF65-F5344CB8AC3E}">
+        <p14:creationId xmlns:p14="http://schemas.microsoft.com/office/powerpoint/2010/main" val="4274819867"/>
+      </p:ext>
+    </p:extLst>
+  </p:cSld>
+  <p:clrMapOvr>
+    <a:masterClrMapping/>
+  </p:clrMapOvr>
+  <p:timing>
+    <p:tnLst>
+      <p:par>
+        <p:cTn id="1" dur="indefinite" restart="never" nodeType="tmRoot">
+          <p:childTnLst>
+            <p:seq concurrent="1" nextAc="seek">
+              <p:cTn id="2" dur="indefinite" nodeType="mainSeq">
+                <p:childTnLst>
+                  <p:par>
+                    <p:cTn id="3" fill="hold">
+                      <p:stCondLst>
+                        <p:cond delay="indefinite"/>
+                      </p:stCondLst>
+                      <p:childTnLst>
+                        <p:par>
+                          <p:cTn id="4" fill="hold">
+                            <p:stCondLst>
+                              <p:cond delay="0"/>
+                            </p:stCondLst>
+                            <p:childTnLst>
+                              <p:par>
+                                <p:cTn id="5" presetID="1" presetClass="entr" presetSubtype="0" fill="hold" grpId="0" nodeType="clickEffect">
+                                  <p:stCondLst>
+                                    <p:cond delay="0"/>
+                                  </p:stCondLst>
+                                  <p:childTnLst>
+                                    <p:set>
+                                      <p:cBhvr>
+                                        <p:cTn id="6" dur="1" fill="hold">
+                                          <p:stCondLst>
+                                            <p:cond delay="0"/>
+                                          </p:stCondLst>
+                                        </p:cTn>
+                                        <p:tgtEl>
+                                          <p:spTgt spid="11"/>
+                                        </p:tgtEl>
+                                        <p:attrNameLst>
+                                          <p:attrName>style.visibility</p:attrName>
+                                        </p:attrNameLst>
+                                      </p:cBhvr>
+                                      <p:to>
+                                        <p:strVal val="visible"/>
+                                      </p:to>
+                                    </p:set>
+                                  </p:childTnLst>
+                                </p:cTn>
+                              </p:par>
+                            </p:childTnLst>
+                          </p:cTn>
+                        </p:par>
+                      </p:childTnLst>
+                    </p:cTn>
+                  </p:par>
+                  <p:par>
+                    <p:cTn id="7" fill="hold">
+                      <p:stCondLst>
+                        <p:cond delay="indefinite"/>
+                      </p:stCondLst>
+                      <p:childTnLst>
+                        <p:par>
+                          <p:cTn id="8" fill="hold">
+                            <p:stCondLst>
+                              <p:cond delay="0"/>
+                            </p:stCondLst>
+                            <p:childTnLst>
+                              <p:par>
+                                <p:cTn id="9" presetID="1" presetClass="entr" presetSubtype="0" fill="hold" grpId="0" nodeType="clickEffect">
+                                  <p:stCondLst>
+                                    <p:cond delay="0"/>
+                                  </p:stCondLst>
+                                  <p:childTnLst>
+                                    <p:set>
+                                      <p:cBhvr>
+                                        <p:cTn id="10" dur="1" fill="hold">
+                                          <p:stCondLst>
+                                            <p:cond delay="0"/>
+                                          </p:stCondLst>
+                                        </p:cTn>
+                                        <p:tgtEl>
+                                          <p:spTgt spid="12"/>
+                                        </p:tgtEl>
+                                        <p:attrNameLst>
+                                          <p:attrName>style.visibility</p:attrName>
+                                        </p:attrNameLst>
+                                      </p:cBhvr>
+                                      <p:to>
+                                        <p:strVal val="visible"/>
+                                      </p:to>
+                                    </p:set>
+                                  </p:childTnLst>
+                                </p:cTn>
+                              </p:par>
+                            </p:childTnLst>
+                          </p:cTn>
+                        </p:par>
+                      </p:childTnLst>
+                    </p:cTn>
+                  </p:par>
+                </p:childTnLst>
+              </p:cTn>
+              <p:prevCondLst>
+                <p:cond evt="onPrev" delay="0">
+                  <p:tgtEl>
+                    <p:sldTgt/>
+                  </p:tgtEl>
+                </p:cond>
+              </p:prevCondLst>
+              <p:nextCondLst>
+                <p:cond evt="onNext" delay="0">
+                  <p:tgtEl>
+                    <p:sldTgt/>
+                  </p:tgtEl>
+                </p:cond>
+              </p:nextCondLst>
+            </p:seq>
+          </p:childTnLst>
+        </p:cTn>
+      </p:par>
+    </p:tnLst>
+    <p:bldLst>
+      <p:bldP spid="11" grpId="0"/>
+      <p:bldP spid="12" grpId="0"/>
     </p:bldLst>
   </p:timing>
 </p:sld>
@@ -11080,8 +12560,8 @@
         </p:nvSpPr>
         <p:spPr>
           <a:xfrm>
-            <a:off x="901349" y="2644546"/>
-            <a:ext cx="5615134" cy="516330"/>
+            <a:off x="307692" y="2628991"/>
+            <a:ext cx="6956991" cy="516330"/>
           </a:xfrm>
           <a:prstGeom prst="rect">
             <a:avLst/>
@@ -11117,6 +12597,14 @@
                 </a:solidFill>
               </a:rPr>
               <a:t>QuickED</a:t>
+            </a:r>
+            <a:r>
+              <a:rPr lang="en-US" sz="2000" b="1" noProof="0" dirty="0">
+                <a:solidFill>
+                  <a:srgbClr val="C00000"/>
+                </a:solidFill>
+              </a:rPr>
+              <a:t> rationale</a:t>
             </a:r>
             <a:r>
               <a:rPr lang="en-US" sz="2000" noProof="0" dirty="0">
@@ -13668,6 +15156,1177 @@
         <p:cNvPr id="1" name="Shape 139">
           <a:extLst>
             <a:ext uri="{FF2B5EF4-FFF2-40B4-BE49-F238E27FC236}">
+              <a16:creationId xmlns:a16="http://schemas.microsoft.com/office/drawing/2014/main" id="{53D4F99F-204B-4C75-E6A0-5E629E5A26D2}"/>
+            </a:ext>
+          </a:extLst>
+        </p:cNvPr>
+        <p:cNvGrpSpPr/>
+        <p:nvPr/>
+      </p:nvGrpSpPr>
+      <p:grpSpPr>
+        <a:xfrm>
+          <a:off x="0" y="0"/>
+          <a:ext cx="0" cy="0"/>
+          <a:chOff x="0" y="0"/>
+          <a:chExt cx="0" cy="0"/>
+        </a:xfrm>
+      </p:grpSpPr>
+      <p:sp>
+        <p:nvSpPr>
+          <p:cNvPr id="2" name="Rectangle 1">
+            <a:extLst>
+              <a:ext uri="{FF2B5EF4-FFF2-40B4-BE49-F238E27FC236}">
+                <a16:creationId xmlns:a16="http://schemas.microsoft.com/office/drawing/2014/main" id="{6FA10E7E-986D-1F27-FDE7-67175E5C2D6A}"/>
+              </a:ext>
+            </a:extLst>
+          </p:cNvPr>
+          <p:cNvSpPr/>
+          <p:nvPr/>
+        </p:nvSpPr>
+        <p:spPr>
+          <a:xfrm>
+            <a:off x="135732" y="4159044"/>
+            <a:ext cx="2075592" cy="902031"/>
+          </a:xfrm>
+          <a:prstGeom prst="rect">
+            <a:avLst/>
+          </a:prstGeom>
+          <a:solidFill>
+            <a:schemeClr val="accent1">
+              <a:lumMod val="20000"/>
+              <a:lumOff val="80000"/>
+            </a:schemeClr>
+          </a:solidFill>
+          <a:ln w="9525"/>
+        </p:spPr>
+        <p:style>
+          <a:lnRef idx="2">
+            <a:schemeClr val="accent1">
+              <a:shade val="15000"/>
+            </a:schemeClr>
+          </a:lnRef>
+          <a:fillRef idx="1">
+            <a:schemeClr val="accent1"/>
+          </a:fillRef>
+          <a:effectRef idx="0">
+            <a:schemeClr val="accent1"/>
+          </a:effectRef>
+          <a:fontRef idx="minor">
+            <a:schemeClr val="lt1"/>
+          </a:fontRef>
+        </p:style>
+        <p:txBody>
+          <a:bodyPr rtlCol="0" anchor="ctr"/>
+          <a:lstStyle/>
+          <a:p>
+            <a:pPr algn="ctr"/>
+            <a:endParaRPr lang="ca-ES" dirty="0"/>
+          </a:p>
+        </p:txBody>
+      </p:sp>
+      <p:pic>
+        <p:nvPicPr>
+          <p:cNvPr id="143" name="Google Shape;143;p23">
+            <a:extLst>
+              <a:ext uri="{FF2B5EF4-FFF2-40B4-BE49-F238E27FC236}">
+                <a16:creationId xmlns:a16="http://schemas.microsoft.com/office/drawing/2014/main" id="{8058E7A5-4453-229C-13E4-D9C6ACC97DB4}"/>
+              </a:ext>
+            </a:extLst>
+          </p:cNvPr>
+          <p:cNvPicPr preferRelativeResize="0"/>
+          <p:nvPr/>
+        </p:nvPicPr>
+        <p:blipFill>
+          <a:blip r:embed="rId3">
+            <a:alphaModFix/>
+          </a:blip>
+          <a:stretch>
+            <a:fillRect/>
+          </a:stretch>
+        </p:blipFill>
+        <p:spPr>
+          <a:xfrm rot="18716787">
+            <a:off x="295019" y="333827"/>
+            <a:ext cx="761387" cy="774932"/>
+          </a:xfrm>
+          <a:prstGeom prst="rect">
+            <a:avLst/>
+          </a:prstGeom>
+          <a:noFill/>
+          <a:ln>
+            <a:noFill/>
+          </a:ln>
+        </p:spPr>
+      </p:pic>
+      <p:sp>
+        <p:nvSpPr>
+          <p:cNvPr id="10" name="Oval 9">
+            <a:extLst>
+              <a:ext uri="{FF2B5EF4-FFF2-40B4-BE49-F238E27FC236}">
+                <a16:creationId xmlns:a16="http://schemas.microsoft.com/office/drawing/2014/main" id="{C4EFC711-0E1C-959F-1022-531D9D3B6F39}"/>
+              </a:ext>
+            </a:extLst>
+          </p:cNvPr>
+          <p:cNvSpPr/>
+          <p:nvPr/>
+        </p:nvSpPr>
+        <p:spPr>
+          <a:xfrm>
+            <a:off x="2211324" y="1805459"/>
+            <a:ext cx="45719" cy="45719"/>
+          </a:xfrm>
+          <a:prstGeom prst="ellipse">
+            <a:avLst/>
+          </a:prstGeom>
+          <a:solidFill>
+            <a:srgbClr val="FFFF00"/>
+          </a:solidFill>
+          <a:ln>
+            <a:solidFill>
+              <a:srgbClr val="FFFF00"/>
+            </a:solidFill>
+          </a:ln>
+        </p:spPr>
+        <p:style>
+          <a:lnRef idx="2">
+            <a:schemeClr val="accent1">
+              <a:shade val="15000"/>
+            </a:schemeClr>
+          </a:lnRef>
+          <a:fillRef idx="1">
+            <a:schemeClr val="accent1"/>
+          </a:fillRef>
+          <a:effectRef idx="0">
+            <a:schemeClr val="accent1"/>
+          </a:effectRef>
+          <a:fontRef idx="minor">
+            <a:schemeClr val="lt1"/>
+          </a:fontRef>
+        </p:style>
+        <p:txBody>
+          <a:bodyPr rtlCol="0" anchor="ctr"/>
+          <a:lstStyle/>
+          <a:p>
+            <a:pPr algn="ctr"/>
+            <a:endParaRPr lang="en-US" noProof="0" dirty="0"/>
+          </a:p>
+        </p:txBody>
+      </p:sp>
+      <p:sp>
+        <p:nvSpPr>
+          <p:cNvPr id="11" name="Google Shape;499;p31">
+            <a:extLst>
+              <a:ext uri="{FF2B5EF4-FFF2-40B4-BE49-F238E27FC236}">
+                <a16:creationId xmlns:a16="http://schemas.microsoft.com/office/drawing/2014/main" id="{FBB72015-FE64-C77A-5A0F-7979F59D70B1}"/>
+              </a:ext>
+            </a:extLst>
+          </p:cNvPr>
+          <p:cNvSpPr/>
+          <p:nvPr/>
+        </p:nvSpPr>
+        <p:spPr>
+          <a:xfrm>
+            <a:off x="3207998" y="179148"/>
+            <a:ext cx="5615134" cy="516330"/>
+          </a:xfrm>
+          <a:prstGeom prst="rect">
+            <a:avLst/>
+          </a:prstGeom>
+          <a:noFill/>
+          <a:ln w="9525" cap="flat" cmpd="sng">
+            <a:noFill/>
+            <a:prstDash val="solid"/>
+            <a:round/>
+            <a:headEnd type="none" w="sm" len="sm"/>
+            <a:tailEnd type="none" w="sm" len="sm"/>
+          </a:ln>
+        </p:spPr>
+        <p:txBody>
+          <a:bodyPr spcFirstLastPara="1" wrap="square" lIns="91425" tIns="91425" rIns="91425" bIns="91425" anchor="ctr" anchorCtr="0">
+            <a:noAutofit/>
+          </a:bodyPr>
+          <a:lstStyle/>
+          <a:p>
+            <a:pPr marL="0" lvl="0" indent="0" algn="ctr" rtl="0">
+              <a:spcBef>
+                <a:spcPts val="0"/>
+              </a:spcBef>
+              <a:spcAft>
+                <a:spcPts val="0"/>
+              </a:spcAft>
+              <a:buNone/>
+            </a:pPr>
+            <a:r>
+              <a:rPr lang="en-US" sz="2000" b="1" noProof="0" dirty="0">
+                <a:solidFill>
+                  <a:srgbClr val="C00000"/>
+                </a:solidFill>
+              </a:rPr>
+              <a:t>Tile-Computation: </a:t>
+            </a:r>
+            <a:r>
+              <a:rPr lang="en-US" sz="2000" dirty="0">
+                <a:solidFill>
+                  <a:srgbClr val="C00000"/>
+                </a:solidFill>
+              </a:rPr>
+              <a:t>orchestrate </a:t>
+            </a:r>
+            <a:r>
+              <a:rPr lang="en-US" sz="2000" noProof="0" dirty="0">
+                <a:solidFill>
+                  <a:srgbClr val="C00000"/>
+                </a:solidFill>
+              </a:rPr>
+              <a:t>optimal sequence of tile computations</a:t>
+            </a:r>
+            <a:endParaRPr lang="en-US" sz="2000" b="1" noProof="0" dirty="0">
+              <a:solidFill>
+                <a:srgbClr val="C00000"/>
+              </a:solidFill>
+            </a:endParaRPr>
+          </a:p>
+        </p:txBody>
+      </p:sp>
+      <p:sp>
+        <p:nvSpPr>
+          <p:cNvPr id="12" name="Google Shape;499;p31">
+            <a:extLst>
+              <a:ext uri="{FF2B5EF4-FFF2-40B4-BE49-F238E27FC236}">
+                <a16:creationId xmlns:a16="http://schemas.microsoft.com/office/drawing/2014/main" id="{9DBC2E79-2E0C-C626-2A58-DFE431DE506D}"/>
+              </a:ext>
+            </a:extLst>
+          </p:cNvPr>
+          <p:cNvSpPr/>
+          <p:nvPr/>
+        </p:nvSpPr>
+        <p:spPr>
+          <a:xfrm>
+            <a:off x="4713584" y="1052885"/>
+            <a:ext cx="3938987" cy="3035367"/>
+          </a:xfrm>
+          <a:prstGeom prst="rect">
+            <a:avLst/>
+          </a:prstGeom>
+          <a:noFill/>
+          <a:ln w="9525" cap="flat" cmpd="sng">
+            <a:noFill/>
+            <a:prstDash val="solid"/>
+            <a:round/>
+            <a:headEnd type="none" w="sm" len="sm"/>
+            <a:tailEnd type="none" w="sm" len="sm"/>
+          </a:ln>
+        </p:spPr>
+        <p:txBody>
+          <a:bodyPr spcFirstLastPara="1" wrap="square" lIns="91425" tIns="91425" rIns="91425" bIns="91425" anchor="ctr" anchorCtr="0">
+            <a:noAutofit/>
+          </a:bodyPr>
+          <a:lstStyle/>
+          <a:p>
+            <a:pPr marL="0" lvl="0" indent="0" rtl="0">
+              <a:spcBef>
+                <a:spcPts val="1200"/>
+              </a:spcBef>
+              <a:spcAft>
+                <a:spcPts val="0"/>
+              </a:spcAft>
+              <a:buNone/>
+            </a:pPr>
+            <a:r>
+              <a:rPr lang="en-US" sz="2000" b="1" noProof="0" dirty="0">
+                <a:solidFill>
+                  <a:srgbClr val="007E39"/>
+                </a:solidFill>
+              </a:rPr>
+              <a:t>1</a:t>
+            </a:r>
+            <a:r>
+              <a:rPr lang="en-US" sz="2000" noProof="0" dirty="0">
+                <a:solidFill>
+                  <a:srgbClr val="007E39"/>
+                </a:solidFill>
+              </a:rPr>
+              <a:t>: promising cost is actual cost + minimum cost to reach final matrix corner</a:t>
+            </a:r>
+          </a:p>
+          <a:p>
+            <a:pPr marL="0" lvl="0" indent="0" rtl="0">
+              <a:spcBef>
+                <a:spcPts val="1200"/>
+              </a:spcBef>
+              <a:spcAft>
+                <a:spcPts val="0"/>
+              </a:spcAft>
+              <a:buNone/>
+            </a:pPr>
+            <a:r>
+              <a:rPr lang="en-US" sz="2000" b="1" dirty="0">
+                <a:solidFill>
+                  <a:srgbClr val="007E39"/>
+                </a:solidFill>
+              </a:rPr>
+              <a:t>2</a:t>
+            </a:r>
+            <a:r>
+              <a:rPr lang="en-US" sz="2000" dirty="0">
+                <a:solidFill>
+                  <a:srgbClr val="007E39"/>
+                </a:solidFill>
+              </a:rPr>
+              <a:t>: starting in an advanced position in a certain super-antidiagonal can be tricky: must consider best and worst cases</a:t>
+            </a:r>
+            <a:endParaRPr lang="en-US" sz="2000" noProof="0" dirty="0">
+              <a:solidFill>
+                <a:srgbClr val="007E39"/>
+              </a:solidFill>
+            </a:endParaRPr>
+          </a:p>
+        </p:txBody>
+      </p:sp>
+      <p:pic>
+        <p:nvPicPr>
+          <p:cNvPr id="13" name="Google Shape;143;p23">
+            <a:extLst>
+              <a:ext uri="{FF2B5EF4-FFF2-40B4-BE49-F238E27FC236}">
+                <a16:creationId xmlns:a16="http://schemas.microsoft.com/office/drawing/2014/main" id="{75C75B2B-1874-04AB-CAB1-163941033875}"/>
+              </a:ext>
+            </a:extLst>
+          </p:cNvPr>
+          <p:cNvPicPr preferRelativeResize="0"/>
+          <p:nvPr/>
+        </p:nvPicPr>
+        <p:blipFill>
+          <a:blip r:embed="rId3">
+            <a:alphaModFix/>
+          </a:blip>
+          <a:stretch>
+            <a:fillRect/>
+          </a:stretch>
+        </p:blipFill>
+        <p:spPr>
+          <a:xfrm rot="18716787">
+            <a:off x="855947" y="847396"/>
+            <a:ext cx="761387" cy="774932"/>
+          </a:xfrm>
+          <a:prstGeom prst="rect">
+            <a:avLst/>
+          </a:prstGeom>
+          <a:noFill/>
+          <a:ln>
+            <a:noFill/>
+          </a:ln>
+        </p:spPr>
+      </p:pic>
+      <p:cxnSp>
+        <p:nvCxnSpPr>
+          <p:cNvPr id="4" name="Connector recte 3">
+            <a:extLst>
+              <a:ext uri="{FF2B5EF4-FFF2-40B4-BE49-F238E27FC236}">
+                <a16:creationId xmlns:a16="http://schemas.microsoft.com/office/drawing/2014/main" id="{F1379FE6-9BED-883F-8FEB-9AFE3695C170}"/>
+              </a:ext>
+            </a:extLst>
+          </p:cNvPr>
+          <p:cNvCxnSpPr/>
+          <p:nvPr/>
+        </p:nvCxnSpPr>
+        <p:spPr>
+          <a:xfrm>
+            <a:off x="1767498" y="1222145"/>
+            <a:ext cx="570160" cy="513569"/>
+          </a:xfrm>
+          <a:prstGeom prst="line">
+            <a:avLst/>
+          </a:prstGeom>
+          <a:ln w="38100"/>
+        </p:spPr>
+        <p:style>
+          <a:lnRef idx="1">
+            <a:schemeClr val="accent1"/>
+          </a:lnRef>
+          <a:fillRef idx="0">
+            <a:schemeClr val="accent1"/>
+          </a:fillRef>
+          <a:effectRef idx="0">
+            <a:schemeClr val="accent1"/>
+          </a:effectRef>
+          <a:fontRef idx="minor">
+            <a:schemeClr val="tx1"/>
+          </a:fontRef>
+        </p:style>
+      </p:cxnSp>
+      <p:cxnSp>
+        <p:nvCxnSpPr>
+          <p:cNvPr id="5" name="Connector recte 4">
+            <a:extLst>
+              <a:ext uri="{FF2B5EF4-FFF2-40B4-BE49-F238E27FC236}">
+                <a16:creationId xmlns:a16="http://schemas.microsoft.com/office/drawing/2014/main" id="{0B5AB8D0-0583-23EF-ECAB-568218C02AA7}"/>
+              </a:ext>
+            </a:extLst>
+          </p:cNvPr>
+          <p:cNvCxnSpPr/>
+          <p:nvPr/>
+        </p:nvCxnSpPr>
+        <p:spPr>
+          <a:xfrm>
+            <a:off x="1293640" y="1766428"/>
+            <a:ext cx="570160" cy="513569"/>
+          </a:xfrm>
+          <a:prstGeom prst="line">
+            <a:avLst/>
+          </a:prstGeom>
+          <a:ln w="38100"/>
+        </p:spPr>
+        <p:style>
+          <a:lnRef idx="1">
+            <a:schemeClr val="accent1"/>
+          </a:lnRef>
+          <a:fillRef idx="0">
+            <a:schemeClr val="accent1"/>
+          </a:fillRef>
+          <a:effectRef idx="0">
+            <a:schemeClr val="accent1"/>
+          </a:effectRef>
+          <a:fontRef idx="minor">
+            <a:schemeClr val="tx1"/>
+          </a:fontRef>
+        </p:style>
+      </p:cxnSp>
+      <p:cxnSp>
+        <p:nvCxnSpPr>
+          <p:cNvPr id="6" name="Connector recte 5">
+            <a:extLst>
+              <a:ext uri="{FF2B5EF4-FFF2-40B4-BE49-F238E27FC236}">
+                <a16:creationId xmlns:a16="http://schemas.microsoft.com/office/drawing/2014/main" id="{EB965F3B-F94D-F86C-9340-AA8349194994}"/>
+              </a:ext>
+            </a:extLst>
+          </p:cNvPr>
+          <p:cNvCxnSpPr>
+            <a:cxnSpLocks/>
+          </p:cNvCxnSpPr>
+          <p:nvPr/>
+        </p:nvCxnSpPr>
+        <p:spPr>
+          <a:xfrm flipH="1">
+            <a:off x="1863800" y="1731116"/>
+            <a:ext cx="473858" cy="548881"/>
+          </a:xfrm>
+          <a:prstGeom prst="line">
+            <a:avLst/>
+          </a:prstGeom>
+          <a:ln w="38100">
+            <a:solidFill>
+              <a:srgbClr val="7030A0"/>
+            </a:solidFill>
+          </a:ln>
+        </p:spPr>
+        <p:style>
+          <a:lnRef idx="1">
+            <a:schemeClr val="accent1"/>
+          </a:lnRef>
+          <a:fillRef idx="0">
+            <a:schemeClr val="accent1"/>
+          </a:fillRef>
+          <a:effectRef idx="0">
+            <a:schemeClr val="accent1"/>
+          </a:effectRef>
+          <a:fontRef idx="minor">
+            <a:schemeClr val="tx1"/>
+          </a:fontRef>
+        </p:style>
+      </p:cxnSp>
+      <p:sp>
+        <p:nvSpPr>
+          <p:cNvPr id="8" name="Crida: línia corbada 7">
+            <a:extLst>
+              <a:ext uri="{FF2B5EF4-FFF2-40B4-BE49-F238E27FC236}">
+                <a16:creationId xmlns:a16="http://schemas.microsoft.com/office/drawing/2014/main" id="{386D838D-A5BB-A7D3-0F13-D1B138307BFC}"/>
+              </a:ext>
+            </a:extLst>
+          </p:cNvPr>
+          <p:cNvSpPr/>
+          <p:nvPr/>
+        </p:nvSpPr>
+        <p:spPr>
+          <a:xfrm>
+            <a:off x="2835497" y="1291890"/>
+            <a:ext cx="1085311" cy="513569"/>
+          </a:xfrm>
+          <a:prstGeom prst="borderCallout2">
+            <a:avLst>
+              <a:gd name="adj1" fmla="val 18750"/>
+              <a:gd name="adj2" fmla="val -8333"/>
+              <a:gd name="adj3" fmla="val 28867"/>
+              <a:gd name="adj4" fmla="val -25532"/>
+              <a:gd name="adj5" fmla="val 82634"/>
+              <a:gd name="adj6" fmla="val -42319"/>
+            </a:avLst>
+          </a:prstGeom>
+          <a:solidFill>
+            <a:schemeClr val="accent1">
+              <a:lumMod val="20000"/>
+              <a:lumOff val="80000"/>
+            </a:schemeClr>
+          </a:solidFill>
+          <a:ln w="12700">
+            <a:headEnd type="none" w="med" len="med"/>
+            <a:tailEnd type="triangle" w="med" len="med"/>
+          </a:ln>
+        </p:spPr>
+        <p:style>
+          <a:lnRef idx="2">
+            <a:schemeClr val="accent1">
+              <a:shade val="15000"/>
+            </a:schemeClr>
+          </a:lnRef>
+          <a:fillRef idx="1">
+            <a:schemeClr val="accent1"/>
+          </a:fillRef>
+          <a:effectRef idx="0">
+            <a:schemeClr val="accent1"/>
+          </a:effectRef>
+          <a:fontRef idx="minor">
+            <a:schemeClr val="lt1"/>
+          </a:fontRef>
+        </p:style>
+        <p:txBody>
+          <a:bodyPr rtlCol="0" anchor="ctr"/>
+          <a:lstStyle/>
+          <a:p>
+            <a:pPr algn="ctr"/>
+            <a:r>
+              <a:rPr lang="en-US" b="1" dirty="0">
+                <a:solidFill>
+                  <a:srgbClr val="002060"/>
+                </a:solidFill>
+              </a:rPr>
+              <a:t>b</a:t>
+            </a:r>
+            <a:r>
+              <a:rPr lang="en-US" b="1" noProof="0" dirty="0">
+                <a:solidFill>
+                  <a:srgbClr val="002060"/>
+                </a:solidFill>
+              </a:rPr>
+              <a:t>est</a:t>
+            </a:r>
+            <a:r>
+              <a:rPr lang="en-US" noProof="0" dirty="0">
+                <a:solidFill>
+                  <a:srgbClr val="002060"/>
+                </a:solidFill>
+              </a:rPr>
+              <a:t> cost from </a:t>
+            </a:r>
+            <a:r>
+              <a:rPr lang="en-US" b="1" noProof="0" dirty="0">
+                <a:solidFill>
+                  <a:srgbClr val="002060"/>
+                </a:solidFill>
+              </a:rPr>
+              <a:t>right</a:t>
+            </a:r>
+          </a:p>
+        </p:txBody>
+      </p:sp>
+      <p:sp>
+        <p:nvSpPr>
+          <p:cNvPr id="15" name="Crida: línia corbada 14">
+            <a:extLst>
+              <a:ext uri="{FF2B5EF4-FFF2-40B4-BE49-F238E27FC236}">
+                <a16:creationId xmlns:a16="http://schemas.microsoft.com/office/drawing/2014/main" id="{A434385C-152A-9DAA-6BAC-F6270A62B567}"/>
+              </a:ext>
+            </a:extLst>
+          </p:cNvPr>
+          <p:cNvSpPr/>
+          <p:nvPr/>
+        </p:nvSpPr>
+        <p:spPr>
+          <a:xfrm>
+            <a:off x="491429" y="2571750"/>
+            <a:ext cx="1012382" cy="516330"/>
+          </a:xfrm>
+          <a:prstGeom prst="borderCallout2">
+            <a:avLst>
+              <a:gd name="adj1" fmla="val -10956"/>
+              <a:gd name="adj2" fmla="val 60281"/>
+              <a:gd name="adj3" fmla="val -42948"/>
+              <a:gd name="adj4" fmla="val 74286"/>
+              <a:gd name="adj5" fmla="val -56598"/>
+              <a:gd name="adj6" fmla="val 134703"/>
+            </a:avLst>
+          </a:prstGeom>
+          <a:solidFill>
+            <a:schemeClr val="accent1">
+              <a:lumMod val="20000"/>
+              <a:lumOff val="80000"/>
+            </a:schemeClr>
+          </a:solidFill>
+          <a:ln w="12700">
+            <a:headEnd type="none" w="med" len="med"/>
+            <a:tailEnd type="triangle" w="med" len="med"/>
+          </a:ln>
+        </p:spPr>
+        <p:style>
+          <a:lnRef idx="2">
+            <a:schemeClr val="accent1">
+              <a:shade val="15000"/>
+            </a:schemeClr>
+          </a:lnRef>
+          <a:fillRef idx="1">
+            <a:schemeClr val="accent1"/>
+          </a:fillRef>
+          <a:effectRef idx="0">
+            <a:schemeClr val="accent1"/>
+          </a:effectRef>
+          <a:fontRef idx="minor">
+            <a:schemeClr val="lt1"/>
+          </a:fontRef>
+        </p:style>
+        <p:txBody>
+          <a:bodyPr rtlCol="0" anchor="ctr"/>
+          <a:lstStyle/>
+          <a:p>
+            <a:pPr algn="ctr"/>
+            <a:r>
+              <a:rPr lang="en-US" b="1" dirty="0">
+                <a:solidFill>
+                  <a:srgbClr val="002060"/>
+                </a:solidFill>
+              </a:rPr>
+              <a:t>b</a:t>
+            </a:r>
+            <a:r>
+              <a:rPr lang="en-US" b="1" noProof="0" dirty="0">
+                <a:solidFill>
+                  <a:srgbClr val="002060"/>
+                </a:solidFill>
+              </a:rPr>
+              <a:t>est</a:t>
+            </a:r>
+            <a:r>
+              <a:rPr lang="en-US" noProof="0" dirty="0">
+                <a:solidFill>
+                  <a:srgbClr val="002060"/>
+                </a:solidFill>
+              </a:rPr>
+              <a:t> cost from </a:t>
+            </a:r>
+            <a:r>
+              <a:rPr lang="en-US" b="1" noProof="0" dirty="0">
+                <a:solidFill>
+                  <a:srgbClr val="002060"/>
+                </a:solidFill>
+              </a:rPr>
+              <a:t>left</a:t>
+            </a:r>
+          </a:p>
+        </p:txBody>
+      </p:sp>
+      <p:sp>
+        <p:nvSpPr>
+          <p:cNvPr id="16" name="Crida: línia corbada 15">
+            <a:extLst>
+              <a:ext uri="{FF2B5EF4-FFF2-40B4-BE49-F238E27FC236}">
+                <a16:creationId xmlns:a16="http://schemas.microsoft.com/office/drawing/2014/main" id="{960B9A8C-23A8-790B-4378-11AEDE1A4FCA}"/>
+              </a:ext>
+            </a:extLst>
+          </p:cNvPr>
+          <p:cNvSpPr/>
+          <p:nvPr/>
+        </p:nvSpPr>
+        <p:spPr>
+          <a:xfrm>
+            <a:off x="1827877" y="2744693"/>
+            <a:ext cx="1482047" cy="699177"/>
+          </a:xfrm>
+          <a:prstGeom prst="borderCallout2">
+            <a:avLst>
+              <a:gd name="adj1" fmla="val -10956"/>
+              <a:gd name="adj2" fmla="val 60281"/>
+              <a:gd name="adj3" fmla="val -67212"/>
+              <a:gd name="adj4" fmla="val 55936"/>
+              <a:gd name="adj5" fmla="val -114538"/>
+              <a:gd name="adj6" fmla="val 25936"/>
+            </a:avLst>
+          </a:prstGeom>
+          <a:solidFill>
+            <a:srgbClr val="ECDFF5"/>
+          </a:solidFill>
+          <a:ln w="12700">
+            <a:solidFill>
+              <a:srgbClr val="7030A0"/>
+            </a:solidFill>
+            <a:headEnd type="none" w="med" len="med"/>
+            <a:tailEnd type="triangle" w="med" len="med"/>
+          </a:ln>
+        </p:spPr>
+        <p:style>
+          <a:lnRef idx="2">
+            <a:schemeClr val="accent1">
+              <a:shade val="15000"/>
+            </a:schemeClr>
+          </a:lnRef>
+          <a:fillRef idx="1">
+            <a:schemeClr val="accent1"/>
+          </a:fillRef>
+          <a:effectRef idx="0">
+            <a:schemeClr val="accent1"/>
+          </a:effectRef>
+          <a:fontRef idx="minor">
+            <a:schemeClr val="lt1"/>
+          </a:fontRef>
+        </p:style>
+        <p:txBody>
+          <a:bodyPr rtlCol="0" anchor="ctr"/>
+          <a:lstStyle/>
+          <a:p>
+            <a:pPr algn="ctr"/>
+            <a:r>
+              <a:rPr lang="en-US" noProof="0" dirty="0">
+                <a:solidFill>
+                  <a:srgbClr val="7030A0"/>
+                </a:solidFill>
+              </a:rPr>
+              <a:t>best &amp; worst </a:t>
+            </a:r>
+            <a:r>
+              <a:rPr lang="en-US" b="1" noProof="0" dirty="0">
+                <a:solidFill>
+                  <a:srgbClr val="7030A0"/>
+                </a:solidFill>
+              </a:rPr>
+              <a:t>promising cost</a:t>
+            </a:r>
+          </a:p>
+        </p:txBody>
+      </p:sp>
+      <p:sp>
+        <p:nvSpPr>
+          <p:cNvPr id="18" name="Crida: línia corbada 17">
+            <a:extLst>
+              <a:ext uri="{FF2B5EF4-FFF2-40B4-BE49-F238E27FC236}">
+                <a16:creationId xmlns:a16="http://schemas.microsoft.com/office/drawing/2014/main" id="{F50ADA6F-FE03-703E-8F6E-16E62F2977D2}"/>
+              </a:ext>
+            </a:extLst>
+          </p:cNvPr>
+          <p:cNvSpPr/>
+          <p:nvPr/>
+        </p:nvSpPr>
+        <p:spPr>
+          <a:xfrm>
+            <a:off x="2474751" y="565489"/>
+            <a:ext cx="1085311" cy="513569"/>
+          </a:xfrm>
+          <a:prstGeom prst="borderCallout2">
+            <a:avLst>
+              <a:gd name="adj1" fmla="val 62401"/>
+              <a:gd name="adj2" fmla="val -6702"/>
+              <a:gd name="adj3" fmla="val 64477"/>
+              <a:gd name="adj4" fmla="val -30968"/>
+              <a:gd name="adj5" fmla="val 123987"/>
+              <a:gd name="adj6" fmla="val -64062"/>
+            </a:avLst>
+          </a:prstGeom>
+          <a:solidFill>
+            <a:schemeClr val="accent1">
+              <a:lumMod val="20000"/>
+              <a:lumOff val="80000"/>
+            </a:schemeClr>
+          </a:solidFill>
+          <a:ln w="12700">
+            <a:headEnd type="none" w="med" len="med"/>
+            <a:tailEnd type="triangle" w="med" len="med"/>
+          </a:ln>
+        </p:spPr>
+        <p:style>
+          <a:lnRef idx="2">
+            <a:schemeClr val="accent1">
+              <a:shade val="15000"/>
+            </a:schemeClr>
+          </a:lnRef>
+          <a:fillRef idx="1">
+            <a:schemeClr val="accent1"/>
+          </a:fillRef>
+          <a:effectRef idx="0">
+            <a:schemeClr val="accent1"/>
+          </a:effectRef>
+          <a:fontRef idx="minor">
+            <a:schemeClr val="lt1"/>
+          </a:fontRef>
+        </p:style>
+        <p:txBody>
+          <a:bodyPr rtlCol="0" anchor="ctr"/>
+          <a:lstStyle/>
+          <a:p>
+            <a:pPr algn="ctr"/>
+            <a:r>
+              <a:rPr lang="en-US" b="1" dirty="0">
+                <a:solidFill>
+                  <a:srgbClr val="002060"/>
+                </a:solidFill>
+              </a:rPr>
+              <a:t>b</a:t>
+            </a:r>
+            <a:r>
+              <a:rPr lang="en-US" b="1" noProof="0" dirty="0">
+                <a:solidFill>
+                  <a:srgbClr val="002060"/>
+                </a:solidFill>
+              </a:rPr>
+              <a:t>est</a:t>
+            </a:r>
+            <a:r>
+              <a:rPr lang="en-US" noProof="0" dirty="0">
+                <a:solidFill>
+                  <a:srgbClr val="002060"/>
+                </a:solidFill>
+              </a:rPr>
+              <a:t> cost from </a:t>
+            </a:r>
+            <a:r>
+              <a:rPr lang="en-US" b="1" noProof="0" dirty="0">
+                <a:solidFill>
+                  <a:srgbClr val="002060"/>
+                </a:solidFill>
+              </a:rPr>
+              <a:t>right</a:t>
+            </a:r>
+          </a:p>
+        </p:txBody>
+      </p:sp>
+      <p:sp>
+        <p:nvSpPr>
+          <p:cNvPr id="19" name="Crida: línia corbada 18">
+            <a:extLst>
+              <a:ext uri="{FF2B5EF4-FFF2-40B4-BE49-F238E27FC236}">
+                <a16:creationId xmlns:a16="http://schemas.microsoft.com/office/drawing/2014/main" id="{7AFABC02-D7FF-B30D-EBF8-84D3DF4DE037}"/>
+              </a:ext>
+            </a:extLst>
+          </p:cNvPr>
+          <p:cNvSpPr/>
+          <p:nvPr/>
+        </p:nvSpPr>
+        <p:spPr>
+          <a:xfrm>
+            <a:off x="1293640" y="99176"/>
+            <a:ext cx="1085311" cy="513569"/>
+          </a:xfrm>
+          <a:prstGeom prst="borderCallout2">
+            <a:avLst>
+              <a:gd name="adj1" fmla="val 102605"/>
+              <a:gd name="adj2" fmla="val 40044"/>
+              <a:gd name="adj3" fmla="val 119615"/>
+              <a:gd name="adj4" fmla="val 29911"/>
+              <a:gd name="adj5" fmla="val 117095"/>
+              <a:gd name="adj6" fmla="val -5357"/>
+            </a:avLst>
+          </a:prstGeom>
+          <a:solidFill>
+            <a:schemeClr val="accent1">
+              <a:lumMod val="20000"/>
+              <a:lumOff val="80000"/>
+            </a:schemeClr>
+          </a:solidFill>
+          <a:ln w="12700">
+            <a:headEnd type="none" w="med" len="med"/>
+            <a:tailEnd type="triangle" w="med" len="med"/>
+          </a:ln>
+        </p:spPr>
+        <p:style>
+          <a:lnRef idx="2">
+            <a:schemeClr val="accent1">
+              <a:shade val="15000"/>
+            </a:schemeClr>
+          </a:lnRef>
+          <a:fillRef idx="1">
+            <a:schemeClr val="accent1"/>
+          </a:fillRef>
+          <a:effectRef idx="0">
+            <a:schemeClr val="accent1"/>
+          </a:effectRef>
+          <a:fontRef idx="minor">
+            <a:schemeClr val="lt1"/>
+          </a:fontRef>
+        </p:style>
+        <p:txBody>
+          <a:bodyPr rtlCol="0" anchor="ctr"/>
+          <a:lstStyle/>
+          <a:p>
+            <a:pPr algn="ctr"/>
+            <a:r>
+              <a:rPr lang="en-US" b="1" dirty="0">
+                <a:solidFill>
+                  <a:srgbClr val="002060"/>
+                </a:solidFill>
+              </a:rPr>
+              <a:t>b</a:t>
+            </a:r>
+            <a:r>
+              <a:rPr lang="en-US" b="1" noProof="0" dirty="0">
+                <a:solidFill>
+                  <a:srgbClr val="002060"/>
+                </a:solidFill>
+              </a:rPr>
+              <a:t>est</a:t>
+            </a:r>
+            <a:r>
+              <a:rPr lang="en-US" noProof="0" dirty="0">
+                <a:solidFill>
+                  <a:srgbClr val="002060"/>
+                </a:solidFill>
+              </a:rPr>
+              <a:t> cost from </a:t>
+            </a:r>
+            <a:r>
+              <a:rPr lang="en-US" b="1" noProof="0" dirty="0">
+                <a:solidFill>
+                  <a:srgbClr val="002060"/>
+                </a:solidFill>
+              </a:rPr>
+              <a:t>right</a:t>
+            </a:r>
+          </a:p>
+        </p:txBody>
+      </p:sp>
+      <p:sp>
+        <p:nvSpPr>
+          <p:cNvPr id="20" name="Crida: línia corbada 19">
+            <a:extLst>
+              <a:ext uri="{FF2B5EF4-FFF2-40B4-BE49-F238E27FC236}">
+                <a16:creationId xmlns:a16="http://schemas.microsoft.com/office/drawing/2014/main" id="{BEA352C5-2979-F085-6D79-10A3CFB8C9A3}"/>
+              </a:ext>
+            </a:extLst>
+          </p:cNvPr>
+          <p:cNvSpPr/>
+          <p:nvPr/>
+        </p:nvSpPr>
+        <p:spPr>
+          <a:xfrm>
+            <a:off x="107496" y="1840872"/>
+            <a:ext cx="1012382" cy="516330"/>
+          </a:xfrm>
+          <a:prstGeom prst="borderCallout2">
+            <a:avLst>
+              <a:gd name="adj1" fmla="val -10956"/>
+              <a:gd name="adj2" fmla="val 60281"/>
+              <a:gd name="adj3" fmla="val -32665"/>
+              <a:gd name="adj4" fmla="val 76617"/>
+              <a:gd name="adj5" fmla="val -16608"/>
+              <a:gd name="adj6" fmla="val 115473"/>
+            </a:avLst>
+          </a:prstGeom>
+          <a:solidFill>
+            <a:schemeClr val="accent1">
+              <a:lumMod val="20000"/>
+              <a:lumOff val="80000"/>
+            </a:schemeClr>
+          </a:solidFill>
+          <a:ln w="12700">
+            <a:headEnd type="none" w="med" len="med"/>
+            <a:tailEnd type="triangle" w="med" len="med"/>
+          </a:ln>
+        </p:spPr>
+        <p:style>
+          <a:lnRef idx="2">
+            <a:schemeClr val="accent1">
+              <a:shade val="15000"/>
+            </a:schemeClr>
+          </a:lnRef>
+          <a:fillRef idx="1">
+            <a:schemeClr val="accent1"/>
+          </a:fillRef>
+          <a:effectRef idx="0">
+            <a:schemeClr val="accent1"/>
+          </a:effectRef>
+          <a:fontRef idx="minor">
+            <a:schemeClr val="lt1"/>
+          </a:fontRef>
+        </p:style>
+        <p:txBody>
+          <a:bodyPr rtlCol="0" anchor="ctr"/>
+          <a:lstStyle/>
+          <a:p>
+            <a:pPr algn="ctr"/>
+            <a:r>
+              <a:rPr lang="en-US" b="1" dirty="0">
+                <a:solidFill>
+                  <a:srgbClr val="002060"/>
+                </a:solidFill>
+              </a:rPr>
+              <a:t>b</a:t>
+            </a:r>
+            <a:r>
+              <a:rPr lang="en-US" b="1" noProof="0" dirty="0">
+                <a:solidFill>
+                  <a:srgbClr val="002060"/>
+                </a:solidFill>
+              </a:rPr>
+              <a:t>est</a:t>
+            </a:r>
+            <a:r>
+              <a:rPr lang="en-US" noProof="0" dirty="0">
+                <a:solidFill>
+                  <a:srgbClr val="002060"/>
+                </a:solidFill>
+              </a:rPr>
+              <a:t> cost from </a:t>
+            </a:r>
+            <a:r>
+              <a:rPr lang="en-US" b="1" noProof="0" dirty="0">
+                <a:solidFill>
+                  <a:srgbClr val="002060"/>
+                </a:solidFill>
+              </a:rPr>
+              <a:t>left</a:t>
+            </a:r>
+          </a:p>
+        </p:txBody>
+      </p:sp>
+    </p:spTree>
+    <p:extLst>
+      <p:ext uri="{BB962C8B-B14F-4D97-AF65-F5344CB8AC3E}">
+        <p14:creationId xmlns:p14="http://schemas.microsoft.com/office/powerpoint/2010/main" val="1627150776"/>
+      </p:ext>
+    </p:extLst>
+  </p:cSld>
+  <p:clrMapOvr>
+    <a:masterClrMapping/>
+  </p:clrMapOvr>
+  <p:timing>
+    <p:tnLst>
+      <p:par>
+        <p:cTn id="1" dur="indefinite" restart="never" nodeType="tmRoot">
+          <p:childTnLst>
+            <p:seq concurrent="1" nextAc="seek">
+              <p:cTn id="2" dur="indefinite" nodeType="mainSeq">
+                <p:childTnLst>
+                  <p:par>
+                    <p:cTn id="3" fill="hold">
+                      <p:stCondLst>
+                        <p:cond delay="indefinite"/>
+                      </p:stCondLst>
+                      <p:childTnLst>
+                        <p:par>
+                          <p:cTn id="4" fill="hold">
+                            <p:stCondLst>
+                              <p:cond delay="0"/>
+                            </p:stCondLst>
+                            <p:childTnLst>
+                              <p:par>
+                                <p:cTn id="5" presetID="1" presetClass="entr" presetSubtype="0" fill="hold" grpId="0" nodeType="clickEffect">
+                                  <p:stCondLst>
+                                    <p:cond delay="0"/>
+                                  </p:stCondLst>
+                                  <p:childTnLst>
+                                    <p:set>
+                                      <p:cBhvr>
+                                        <p:cTn id="6" dur="1" fill="hold">
+                                          <p:stCondLst>
+                                            <p:cond delay="0"/>
+                                          </p:stCondLst>
+                                        </p:cTn>
+                                        <p:tgtEl>
+                                          <p:spTgt spid="11"/>
+                                        </p:tgtEl>
+                                        <p:attrNameLst>
+                                          <p:attrName>style.visibility</p:attrName>
+                                        </p:attrNameLst>
+                                      </p:cBhvr>
+                                      <p:to>
+                                        <p:strVal val="visible"/>
+                                      </p:to>
+                                    </p:set>
+                                  </p:childTnLst>
+                                </p:cTn>
+                              </p:par>
+                            </p:childTnLst>
+                          </p:cTn>
+                        </p:par>
+                      </p:childTnLst>
+                    </p:cTn>
+                  </p:par>
+                  <p:par>
+                    <p:cTn id="7" fill="hold">
+                      <p:stCondLst>
+                        <p:cond delay="indefinite"/>
+                      </p:stCondLst>
+                      <p:childTnLst>
+                        <p:par>
+                          <p:cTn id="8" fill="hold">
+                            <p:stCondLst>
+                              <p:cond delay="0"/>
+                            </p:stCondLst>
+                            <p:childTnLst>
+                              <p:par>
+                                <p:cTn id="9" presetID="1" presetClass="entr" presetSubtype="0" fill="hold" grpId="0" nodeType="clickEffect">
+                                  <p:stCondLst>
+                                    <p:cond delay="0"/>
+                                  </p:stCondLst>
+                                  <p:childTnLst>
+                                    <p:set>
+                                      <p:cBhvr>
+                                        <p:cTn id="10" dur="1" fill="hold">
+                                          <p:stCondLst>
+                                            <p:cond delay="0"/>
+                                          </p:stCondLst>
+                                        </p:cTn>
+                                        <p:tgtEl>
+                                          <p:spTgt spid="12"/>
+                                        </p:tgtEl>
+                                        <p:attrNameLst>
+                                          <p:attrName>style.visibility</p:attrName>
+                                        </p:attrNameLst>
+                                      </p:cBhvr>
+                                      <p:to>
+                                        <p:strVal val="visible"/>
+                                      </p:to>
+                                    </p:set>
+                                  </p:childTnLst>
+                                </p:cTn>
+                              </p:par>
+                            </p:childTnLst>
+                          </p:cTn>
+                        </p:par>
+                      </p:childTnLst>
+                    </p:cTn>
+                  </p:par>
+                </p:childTnLst>
+              </p:cTn>
+              <p:prevCondLst>
+                <p:cond evt="onPrev" delay="0">
+                  <p:tgtEl>
+                    <p:sldTgt/>
+                  </p:tgtEl>
+                </p:cond>
+              </p:prevCondLst>
+              <p:nextCondLst>
+                <p:cond evt="onNext" delay="0">
+                  <p:tgtEl>
+                    <p:sldTgt/>
+                  </p:tgtEl>
+                </p:cond>
+              </p:nextCondLst>
+            </p:seq>
+          </p:childTnLst>
+        </p:cTn>
+      </p:par>
+    </p:tnLst>
+    <p:bldLst>
+      <p:bldP spid="11" grpId="0"/>
+      <p:bldP spid="12" grpId="0"/>
+    </p:bldLst>
+  </p:timing>
+</p:sld>
+</file>
+
+<file path=ppt/slides/slide6.xml><?xml version="1.0" encoding="utf-8"?>
+<p:sld xmlns:a="http://schemas.openxmlformats.org/drawingml/2006/main" xmlns:r="http://schemas.openxmlformats.org/officeDocument/2006/relationships" xmlns:p="http://schemas.openxmlformats.org/presentationml/2006/main">
+  <p:cSld>
+    <p:spTree>
+      <p:nvGrpSpPr>
+        <p:cNvPr id="1" name="Shape 139">
+          <a:extLst>
+            <a:ext uri="{FF2B5EF4-FFF2-40B4-BE49-F238E27FC236}">
               <a16:creationId xmlns:a16="http://schemas.microsoft.com/office/drawing/2014/main" id="{039A3B1A-79CA-50F7-AB5B-576805115212}"/>
             </a:ext>
           </a:extLst>
@@ -13726,7 +16385,7 @@
 </p:sld>
 </file>
 
-<file path=ppt/slides/slide6.xml><?xml version="1.0" encoding="utf-8"?>
+<file path=ppt/slides/slide7.xml><?xml version="1.0" encoding="utf-8"?>
 <p:sld xmlns:a="http://schemas.openxmlformats.org/drawingml/2006/main" xmlns:r="http://schemas.openxmlformats.org/officeDocument/2006/relationships" xmlns:p="http://schemas.openxmlformats.org/presentationml/2006/main">
   <p:cSld>
     <p:spTree>
@@ -13792,7 +16451,7 @@
 </p:sld>
 </file>
 
-<file path=ppt/slides/slide7.xml><?xml version="1.0" encoding="utf-8"?>
+<file path=ppt/slides/slide8.xml><?xml version="1.0" encoding="utf-8"?>
 <p:sld xmlns:a="http://schemas.openxmlformats.org/drawingml/2006/main" xmlns:r="http://schemas.openxmlformats.org/officeDocument/2006/relationships" xmlns:p="http://schemas.openxmlformats.org/presentationml/2006/main">
   <p:cSld>
     <p:spTree>
@@ -13858,7 +16517,7 @@
 </p:sld>
 </file>
 
-<file path=ppt/slides/slide8.xml><?xml version="1.0" encoding="utf-8"?>
+<file path=ppt/slides/slide9.xml><?xml version="1.0" encoding="utf-8"?>
 <p:sld xmlns:a="http://schemas.openxmlformats.org/drawingml/2006/main" xmlns:r="http://schemas.openxmlformats.org/officeDocument/2006/relationships" xmlns:p="http://schemas.openxmlformats.org/presentationml/2006/main">
   <p:cSld>
     <p:spTree>
@@ -13915,73 +16574,6 @@
     <p:extLst>
       <p:ext uri="{BB962C8B-B14F-4D97-AF65-F5344CB8AC3E}">
         <p14:creationId xmlns:p14="http://schemas.microsoft.com/office/powerpoint/2010/main" val="473431662"/>
-      </p:ext>
-    </p:extLst>
-  </p:cSld>
-  <p:clrMapOvr>
-    <a:masterClrMapping/>
-  </p:clrMapOvr>
-</p:sld>
-</file>
-
-<file path=ppt/slides/slide9.xml><?xml version="1.0" encoding="utf-8"?>
-<p:sld xmlns:a="http://schemas.openxmlformats.org/drawingml/2006/main" xmlns:r="http://schemas.openxmlformats.org/officeDocument/2006/relationships" xmlns:p="http://schemas.openxmlformats.org/presentationml/2006/main">
-  <p:cSld>
-    <p:spTree>
-      <p:nvGrpSpPr>
-        <p:cNvPr id="1" name="Shape 139">
-          <a:extLst>
-            <a:ext uri="{FF2B5EF4-FFF2-40B4-BE49-F238E27FC236}">
-              <a16:creationId xmlns:a16="http://schemas.microsoft.com/office/drawing/2014/main" id="{FD40D2B8-F17C-9475-662B-68F78CC3C431}"/>
-            </a:ext>
-          </a:extLst>
-        </p:cNvPr>
-        <p:cNvGrpSpPr/>
-        <p:nvPr/>
-      </p:nvGrpSpPr>
-      <p:grpSpPr>
-        <a:xfrm>
-          <a:off x="0" y="0"/>
-          <a:ext cx="0" cy="0"/>
-          <a:chOff x="0" y="0"/>
-          <a:chExt cx="0" cy="0"/>
-        </a:xfrm>
-      </p:grpSpPr>
-      <p:pic>
-        <p:nvPicPr>
-          <p:cNvPr id="4" name="Imatge 3">
-            <a:extLst>
-              <a:ext uri="{FF2B5EF4-FFF2-40B4-BE49-F238E27FC236}">
-                <a16:creationId xmlns:a16="http://schemas.microsoft.com/office/drawing/2014/main" id="{5ED3E121-8BD3-E80C-B07B-68D478B6AD4A}"/>
-              </a:ext>
-            </a:extLst>
-          </p:cNvPr>
-          <p:cNvPicPr>
-            <a:picLocks noChangeAspect="1"/>
-          </p:cNvPicPr>
-          <p:nvPr/>
-        </p:nvPicPr>
-        <p:blipFill>
-          <a:blip r:embed="rId3"/>
-          <a:srcRect t="8631"/>
-          <a:stretch>
-            <a:fillRect/>
-          </a:stretch>
-        </p:blipFill>
-        <p:spPr>
-          <a:xfrm>
-            <a:off x="71162" y="291548"/>
-            <a:ext cx="9039708" cy="4792317"/>
-          </a:xfrm>
-          <a:prstGeom prst="rect">
-            <a:avLst/>
-          </a:prstGeom>
-        </p:spPr>
-      </p:pic>
-    </p:spTree>
-    <p:extLst>
-      <p:ext uri="{BB962C8B-B14F-4D97-AF65-F5344CB8AC3E}">
-        <p14:creationId xmlns:p14="http://schemas.microsoft.com/office/powerpoint/2010/main" val="251131961"/>
       </p:ext>
     </p:extLst>
   </p:cSld>
